--- a/output/education/2026-03-28_medical-fee-revision-2026/medical-fee-revision-2026_slides_attendings.pptx
+++ b/output/education/2026-03-28_medical-fee-revision-2026/medical-fee-revision-2026_slides_attendings.pptx
@@ -3164,7 +3164,9 @@
           <a:bodyPr rtlCol="0" anchor="ctr"/>
           <a:lstStyle/>
           <a:p>
-            <a:pPr algn="ctr"/>
+            <a:pPr algn="ctr">
+              <a:defRPr/>
+            </a:pPr>
           </a:p>
         </p:txBody>
       </p:sp>
@@ -3199,6 +3201,7 @@
               </a:defRPr>
             </a:pPr>
             <a:r>
+              <a:rPr/>
               <a:t>2026年度 診療報酬改定</a:t>
             </a:r>
           </a:p>
@@ -3235,6 +3238,7 @@
               </a:defRPr>
             </a:pPr>
             <a:r>
+              <a:rPr/>
               <a:t>管理者・指導医のための完全ガイド</a:t>
             </a:r>
           </a:p>
@@ -3279,7 +3283,9 @@
           <a:bodyPr rtlCol="0" anchor="ctr"/>
           <a:lstStyle/>
           <a:p>
-            <a:pPr algn="ctr"/>
+            <a:pPr algn="ctr">
+              <a:defRPr/>
+            </a:pPr>
           </a:p>
         </p:txBody>
       </p:sp>
@@ -3314,6 +3320,7 @@
               </a:defRPr>
             </a:pPr>
             <a:r>
+              <a:rPr/>
               <a:t>+3.09%</a:t>
             </a:r>
           </a:p>
@@ -3328,7 +3335,7 @@
         <p:spPr>
           <a:xfrm>
             <a:off x="5029200" y="2651760"/>
-            <a:ext cx="3657600" cy="274320"/>
+            <a:ext cx="3657600" cy="301752"/>
           </a:xfrm>
           <a:prstGeom prst="rect">
             <a:avLst/>
@@ -3350,6 +3357,7 @@
               </a:defRPr>
             </a:pPr>
             <a:r>
+              <a:rPr/>
               <a:t>本体改定率</a:t>
             </a:r>
           </a:p>
@@ -3364,7 +3372,7 @@
         <p:spPr>
           <a:xfrm>
             <a:off x="5029200" y="2971800"/>
-            <a:ext cx="3657600" cy="274320"/>
+            <a:ext cx="3657600" cy="340360"/>
           </a:xfrm>
           <a:prstGeom prst="rect">
             <a:avLst/>
@@ -3386,6 +3394,7 @@
               </a:defRPr>
             </a:pPr>
             <a:r>
+              <a:rPr/>
               <a:t>30年ぶりの大幅引き上げ</a:t>
             </a:r>
           </a:p>
@@ -3430,7 +3439,9 @@
           <a:bodyPr rtlCol="0" anchor="ctr"/>
           <a:lstStyle/>
           <a:p>
-            <a:pPr algn="ctr"/>
+            <a:pPr algn="ctr">
+              <a:defRPr/>
+            </a:pPr>
           </a:p>
         </p:txBody>
       </p:sp>
@@ -3475,7 +3486,9 @@
           <a:bodyPr rtlCol="0" anchor="ctr"/>
           <a:lstStyle/>
           <a:p>
-            <a:pPr algn="ctr"/>
+            <a:pPr algn="ctr">
+              <a:defRPr/>
+            </a:pPr>
           </a:p>
         </p:txBody>
       </p:sp>
@@ -3510,10 +3523,12 @@
               </a:defRPr>
             </a:pPr>
             <a:r>
+              <a:rPr/>
               <a:t>賃上げ・DX・かかりつけ・急性期再編</a:t>
             </a:r>
             <a:br/>
             <a:r>
+              <a:rPr/>
               <a:t>— 4つの柱を読み解く</a:t>
             </a:r>
           </a:p>
@@ -3550,6 +3565,7 @@
               </a:defRPr>
             </a:pPr>
             <a:r>
+              <a:rPr/>
               <a:t>Scribe Agent | 2026-03-28 | ガニェの9教授事象</a:t>
             </a:r>
           </a:p>
@@ -3620,7 +3636,9 @@
           <a:bodyPr rtlCol="0" anchor="ctr"/>
           <a:lstStyle/>
           <a:p>
-            <a:pPr algn="ctr"/>
+            <a:pPr algn="ctr">
+              <a:defRPr/>
+            </a:pPr>
           </a:p>
         </p:txBody>
       </p:sp>
@@ -3633,7 +3651,7 @@
         <p:spPr>
           <a:xfrm>
             <a:off x="640080" y="274320"/>
-            <a:ext cx="7315200" cy="457200"/>
+            <a:ext cx="7315200" cy="482600"/>
           </a:xfrm>
           <a:prstGeom prst="rect">
             <a:avLst/>
@@ -3655,6 +3673,7 @@
               </a:defRPr>
             </a:pPr>
             <a:r>
+              <a:rPr/>
               <a:t>生活習慣病管理料</a:t>
             </a:r>
           </a:p>
@@ -3692,6 +3711,7 @@
               <a:buChar char="●"/>
             </a:pPr>
             <a:r>
+              <a:rPr/>
               <a:t>基本構造は維持（Ⅰ: 610/740/780点、Ⅱ: 333点）</a:t>
             </a:r>
           </a:p>
@@ -3706,6 +3726,7 @@
               <a:buChar char="●"/>
             </a:pPr>
             <a:r>
+              <a:rPr/>
               <a:t>新設: 眼科連携加算・歯科連携加算</a:t>
             </a:r>
           </a:p>
@@ -3720,6 +3741,7 @@
               <a:buChar char="●"/>
             </a:pPr>
             <a:r>
+              <a:rPr/>
               <a:t>療養計画書のICT活用要件緩和</a:t>
             </a:r>
           </a:p>
@@ -3764,7 +3786,9 @@
           <a:bodyPr rtlCol="0" anchor="ctr"/>
           <a:lstStyle/>
           <a:p>
-            <a:pPr algn="ctr"/>
+            <a:pPr algn="ctr">
+              <a:defRPr/>
+            </a:pPr>
           </a:p>
         </p:txBody>
       </p:sp>
@@ -3809,7 +3833,9 @@
           <a:bodyPr rtlCol="0" anchor="ctr"/>
           <a:lstStyle/>
           <a:p>
-            <a:pPr algn="ctr"/>
+            <a:pPr algn="ctr">
+              <a:defRPr/>
+            </a:pPr>
           </a:p>
         </p:txBody>
       </p:sp>
@@ -3844,6 +3870,7 @@
               </a:defRPr>
             </a:pPr>
             <a:r>
+              <a:rPr/>
               <a:t>管理職視点: 多職種・他科連携の体制整備が収益に直結</a:t>
             </a:r>
           </a:p>
@@ -3914,7 +3941,9 @@
           <a:bodyPr rtlCol="0" anchor="ctr"/>
           <a:lstStyle/>
           <a:p>
-            <a:pPr algn="ctr"/>
+            <a:pPr algn="ctr">
+              <a:defRPr/>
+            </a:pPr>
           </a:p>
         </p:txBody>
       </p:sp>
@@ -3927,7 +3956,7 @@
         <p:spPr>
           <a:xfrm>
             <a:off x="640080" y="274320"/>
-            <a:ext cx="7315200" cy="457200"/>
+            <a:ext cx="7315200" cy="482600"/>
           </a:xfrm>
           <a:prstGeom prst="rect">
             <a:avLst/>
@@ -3949,6 +3978,7 @@
               </a:defRPr>
             </a:pPr>
             <a:r>
+              <a:rPr/>
               <a:t>ベースアップ評価料</a:t>
             </a:r>
           </a:p>
@@ -3993,7 +4023,9 @@
           <a:bodyPr rtlCol="0" anchor="ctr"/>
           <a:lstStyle/>
           <a:p>
-            <a:pPr algn="ctr"/>
+            <a:pPr algn="ctr">
+              <a:defRPr/>
+            </a:pPr>
           </a:p>
         </p:txBody>
       </p:sp>
@@ -4006,7 +4038,7 @@
         <p:spPr>
           <a:xfrm>
             <a:off x="914400" y="1005840"/>
-            <a:ext cx="2743200" cy="731520"/>
+            <a:ext cx="2743200" cy="873759"/>
           </a:xfrm>
           <a:prstGeom prst="rect">
             <a:avLst/>
@@ -4028,6 +4060,7 @@
               </a:defRPr>
             </a:pPr>
             <a:r>
+              <a:rPr/>
               <a:t>6点</a:t>
             </a:r>
           </a:p>
@@ -4064,6 +4097,7 @@
               </a:defRPr>
             </a:pPr>
             <a:r>
+              <a:rPr/>
               <a:t>旧: 医療従事者のみ</a:t>
             </a:r>
           </a:p>
@@ -4100,6 +4134,7 @@
               </a:defRPr>
             </a:pPr>
             <a:r>
+              <a:rPr/>
               <a:t>→</a:t>
             </a:r>
           </a:p>
@@ -4144,7 +4179,9 @@
           <a:bodyPr rtlCol="0" anchor="ctr"/>
           <a:lstStyle/>
           <a:p>
-            <a:pPr algn="ctr"/>
+            <a:pPr algn="ctr">
+              <a:defRPr/>
+            </a:pPr>
           </a:p>
         </p:txBody>
       </p:sp>
@@ -4157,7 +4194,7 @@
         <p:spPr>
           <a:xfrm>
             <a:off x="4572000" y="1005840"/>
-            <a:ext cx="4114800" cy="731520"/>
+            <a:ext cx="4114800" cy="873759"/>
           </a:xfrm>
           <a:prstGeom prst="rect">
             <a:avLst/>
@@ -4179,6 +4216,7 @@
               </a:defRPr>
             </a:pPr>
             <a:r>
+              <a:rPr/>
               <a:t>17点</a:t>
             </a:r>
           </a:p>
@@ -4215,6 +4253,7 @@
               </a:defRPr>
             </a:pPr>
             <a:r>
+              <a:rPr/>
               <a:t>新: 事務職員含む全職員</a:t>
             </a:r>
           </a:p>
@@ -4259,7 +4298,9 @@
           <a:bodyPr rtlCol="0" anchor="ctr"/>
           <a:lstStyle/>
           <a:p>
-            <a:pPr algn="ctr"/>
+            <a:pPr algn="ctr">
+              <a:defRPr/>
+            </a:pPr>
           </a:p>
         </p:txBody>
       </p:sp>
@@ -4304,7 +4345,9 @@
           <a:bodyPr rtlCol="0" anchor="ctr"/>
           <a:lstStyle/>
           <a:p>
-            <a:pPr algn="ctr"/>
+            <a:pPr algn="ctr">
+              <a:defRPr/>
+            </a:pPr>
           </a:p>
         </p:txBody>
       </p:sp>
@@ -4339,10 +4382,12 @@
               </a:defRPr>
             </a:pPr>
             <a:r>
+              <a:rPr/>
               <a:t>外来100人/日で年間約600万円増</a:t>
             </a:r>
             <a:br/>
             <a:r>
+              <a:rPr/>
               <a:t>注意: 実際に賃上げに充てる必要あり（報告義務）</a:t>
             </a:r>
           </a:p>
@@ -4413,7 +4458,9 @@
           <a:bodyPr rtlCol="0" anchor="ctr"/>
           <a:lstStyle/>
           <a:p>
-            <a:pPr algn="ctr"/>
+            <a:pPr algn="ctr">
+              <a:defRPr/>
+            </a:pPr>
           </a:p>
         </p:txBody>
       </p:sp>
@@ -4426,7 +4473,7 @@
         <p:spPr>
           <a:xfrm>
             <a:off x="640080" y="274320"/>
-            <a:ext cx="7315200" cy="457200"/>
+            <a:ext cx="7315200" cy="482600"/>
           </a:xfrm>
           <a:prstGeom prst="rect">
             <a:avLst/>
@@ -4448,6 +4495,7 @@
               </a:defRPr>
             </a:pPr>
             <a:r>
+              <a:rPr/>
               <a:t>物価対応料（新設）</a:t>
             </a:r>
           </a:p>
@@ -4492,7 +4540,9 @@
           <a:bodyPr rtlCol="0" anchor="ctr"/>
           <a:lstStyle/>
           <a:p>
-            <a:pPr algn="ctr"/>
+            <a:pPr algn="ctr">
+              <a:defRPr/>
+            </a:pPr>
           </a:p>
         </p:txBody>
       </p:sp>
@@ -4527,6 +4577,7 @@
               </a:defRPr>
             </a:pPr>
             <a:r>
+              <a:rPr/>
               <a:t>2026年6月〜</a:t>
             </a:r>
           </a:p>
@@ -4563,6 +4614,7 @@
               </a:defRPr>
             </a:pPr>
             <a:r>
+              <a:rPr/>
               <a:t>初診 2点 / 再診 2点</a:t>
             </a:r>
           </a:p>
@@ -4607,7 +4659,9 @@
           <a:bodyPr rtlCol="0" anchor="ctr"/>
           <a:lstStyle/>
           <a:p>
-            <a:pPr algn="ctr"/>
+            <a:pPr algn="ctr">
+              <a:defRPr/>
+            </a:pPr>
           </a:p>
         </p:txBody>
       </p:sp>
@@ -4642,6 +4696,7 @@
               </a:defRPr>
             </a:pPr>
             <a:r>
+              <a:rPr/>
               <a:t>2027年度〜</a:t>
             </a:r>
           </a:p>
@@ -4678,6 +4733,7 @@
               </a:defRPr>
             </a:pPr>
             <a:r>
+              <a:rPr/>
               <a:t>初診 4点 / 再診 4点</a:t>
             </a:r>
           </a:p>
@@ -4692,7 +4748,7 @@
         <p:spPr>
           <a:xfrm>
             <a:off x="4754880" y="1965960"/>
-            <a:ext cx="3840480" cy="274320"/>
+            <a:ext cx="3840480" cy="287020"/>
           </a:xfrm>
           <a:prstGeom prst="rect">
             <a:avLst/>
@@ -4714,6 +4770,7 @@
               </a:defRPr>
             </a:pPr>
             <a:r>
+              <a:rPr/>
               <a:t>倍増予定</a:t>
             </a:r>
           </a:p>
@@ -4758,7 +4815,9 @@
           <a:bodyPr rtlCol="0" anchor="ctr"/>
           <a:lstStyle/>
           <a:p>
-            <a:pPr algn="ctr"/>
+            <a:pPr algn="ctr">
+              <a:defRPr/>
+            </a:pPr>
           </a:p>
         </p:txBody>
       </p:sp>
@@ -4803,7 +4862,9 @@
           <a:bodyPr rtlCol="0" anchor="ctr"/>
           <a:lstStyle/>
           <a:p>
-            <a:pPr algn="ctr"/>
+            <a:pPr algn="ctr">
+              <a:defRPr/>
+            </a:pPr>
           </a:p>
         </p:txBody>
       </p:sp>
@@ -4838,10 +4899,12 @@
               </a:defRPr>
             </a:pPr>
             <a:r>
+              <a:rPr/>
               <a:t>小さく見えるが、積み上げると年間数十万円規模</a:t>
             </a:r>
             <a:br/>
             <a:r>
+              <a:rPr/>
               <a:t>2段階実施: 物価動向を見ながら段階的に対応</a:t>
             </a:r>
           </a:p>
@@ -4912,7 +4975,9 @@
           <a:bodyPr rtlCol="0" anchor="ctr"/>
           <a:lstStyle/>
           <a:p>
-            <a:pPr algn="ctr"/>
+            <a:pPr algn="ctr">
+              <a:defRPr/>
+            </a:pPr>
           </a:p>
         </p:txBody>
       </p:sp>
@@ -4947,6 +5012,7 @@
               </a:defRPr>
             </a:pPr>
             <a:r>
+              <a:rPr/>
               <a:t>Section 2</a:t>
             </a:r>
           </a:p>
@@ -4983,6 +5049,7 @@
               </a:defRPr>
             </a:pPr>
             <a:r>
+              <a:rPr/>
               <a:t>入院改定のポイント</a:t>
             </a:r>
           </a:p>
@@ -4997,7 +5064,7 @@
         <p:spPr>
           <a:xfrm>
             <a:off x="640080" y="1097280"/>
-            <a:ext cx="7315200" cy="274320"/>
+            <a:ext cx="7315200" cy="322579"/>
           </a:xfrm>
           <a:prstGeom prst="rect">
             <a:avLst/>
@@ -5019,6 +5086,7 @@
               </a:defRPr>
             </a:pPr>
             <a:r>
+              <a:rPr/>
               <a:t>急性期再編の本丸</a:t>
             </a:r>
           </a:p>
@@ -5056,6 +5124,7 @@
               <a:buChar char="●"/>
             </a:pPr>
             <a:r>
+              <a:rPr/>
               <a:t>地域包括医療病棟の6区分化</a:t>
             </a:r>
           </a:p>
@@ -5070,6 +5139,7 @@
               <a:buChar char="●"/>
             </a:pPr>
             <a:r>
+              <a:rPr/>
               <a:t>急性期入院料の見直し</a:t>
             </a:r>
           </a:p>
@@ -5084,6 +5154,7 @@
               <a:buChar char="●"/>
             </a:pPr>
             <a:r>
+              <a:rPr/>
               <a:t>総合診療機能評価の新設</a:t>
             </a:r>
           </a:p>
@@ -5098,6 +5169,7 @@
               <a:buChar char="●"/>
             </a:pPr>
             <a:r>
+              <a:rPr/>
               <a:t>紹介患者受入加算の拡充（60点新設）</a:t>
             </a:r>
           </a:p>
@@ -5112,6 +5184,7 @@
               <a:buChar char="●"/>
             </a:pPr>
             <a:r>
+              <a:rPr/>
               <a:t>救急の体制加算化</a:t>
             </a:r>
           </a:p>
@@ -5182,7 +5255,9 @@
           <a:bodyPr rtlCol="0" anchor="ctr"/>
           <a:lstStyle/>
           <a:p>
-            <a:pPr algn="ctr"/>
+            <a:pPr algn="ctr">
+              <a:defRPr/>
+            </a:pPr>
           </a:p>
         </p:txBody>
       </p:sp>
@@ -5217,6 +5292,7 @@
               </a:defRPr>
             </a:pPr>
             <a:r>
+              <a:rPr/>
               <a:t>地域包括医療病棟の6区分化</a:t>
             </a:r>
           </a:p>
@@ -5231,7 +5307,7 @@
         <p:spPr>
           <a:xfrm>
             <a:off x="640080" y="731520"/>
-            <a:ext cx="7315200" cy="274320"/>
+            <a:ext cx="7315200" cy="304799"/>
           </a:xfrm>
           <a:prstGeom prst="rect">
             <a:avLst/>
@@ -5253,6 +5329,7 @@
               </a:defRPr>
             </a:pPr>
             <a:r>
+              <a:rPr/>
               <a:t>従来の一律評価 → 6段階の機能分化</a:t>
             </a:r>
           </a:p>
@@ -5573,7 +5650,9 @@
           <a:bodyPr rtlCol="0" anchor="ctr"/>
           <a:lstStyle/>
           <a:p>
-            <a:pPr algn="ctr"/>
+            <a:pPr algn="ctr">
+              <a:defRPr/>
+            </a:pPr>
           </a:p>
         </p:txBody>
       </p:sp>
@@ -5618,7 +5697,9 @@
           <a:bodyPr rtlCol="0" anchor="ctr"/>
           <a:lstStyle/>
           <a:p>
-            <a:pPr algn="ctr"/>
+            <a:pPr algn="ctr">
+              <a:defRPr/>
+            </a:pPr>
           </a:p>
         </p:txBody>
       </p:sp>
@@ -5653,6 +5734,7 @@
               </a:defRPr>
             </a:pPr>
             <a:r>
+              <a:rPr/>
               <a:t>管理職視点: 自院がどの区分に該当するか、早期に評価が必要</a:t>
             </a:r>
           </a:p>
@@ -5723,7 +5805,9 @@
           <a:bodyPr rtlCol="0" anchor="ctr"/>
           <a:lstStyle/>
           <a:p>
-            <a:pPr algn="ctr"/>
+            <a:pPr algn="ctr">
+              <a:defRPr/>
+            </a:pPr>
           </a:p>
         </p:txBody>
       </p:sp>
@@ -5736,7 +5820,7 @@
         <p:spPr>
           <a:xfrm>
             <a:off x="640080" y="274320"/>
-            <a:ext cx="7315200" cy="457200"/>
+            <a:ext cx="7315200" cy="482600"/>
           </a:xfrm>
           <a:prstGeom prst="rect">
             <a:avLst/>
@@ -5758,6 +5842,7 @@
               </a:defRPr>
             </a:pPr>
             <a:r>
+              <a:rPr/>
               <a:t>急性期入院料の再編</a:t>
             </a:r>
           </a:p>
@@ -5795,6 +5880,7 @@
               <a:buChar char="●"/>
             </a:pPr>
             <a:r>
+              <a:rPr/>
               <a:t>看護配置・重症度基準の精緻化</a:t>
             </a:r>
           </a:p>
@@ -5809,6 +5895,7 @@
               <a:buChar char="●"/>
             </a:pPr>
             <a:r>
+              <a:rPr/>
               <a:t>在宅復帰率の評価強化</a:t>
             </a:r>
           </a:p>
@@ -5823,6 +5910,7 @@
               <a:buChar char="●"/>
             </a:pPr>
             <a:r>
+              <a:rPr/>
               <a:t>「急性期」の定義が厳格化</a:t>
             </a:r>
           </a:p>
@@ -5867,7 +5955,9 @@
           <a:bodyPr rtlCol="0" anchor="ctr"/>
           <a:lstStyle/>
           <a:p>
-            <a:pPr algn="ctr"/>
+            <a:pPr algn="ctr">
+              <a:defRPr/>
+            </a:pPr>
           </a:p>
         </p:txBody>
       </p:sp>
@@ -5912,7 +6002,9 @@
           <a:bodyPr rtlCol="0" anchor="ctr"/>
           <a:lstStyle/>
           <a:p>
-            <a:pPr algn="ctr"/>
+            <a:pPr algn="ctr">
+              <a:defRPr/>
+            </a:pPr>
           </a:p>
         </p:txBody>
       </p:sp>
@@ -5947,6 +6039,7 @@
               </a:defRPr>
             </a:pPr>
             <a:r>
+              <a:rPr/>
               <a:t>対応できない病院は区分変更を検討すべきタイミング</a:t>
             </a:r>
           </a:p>
@@ -6017,7 +6110,9 @@
           <a:bodyPr rtlCol="0" anchor="ctr"/>
           <a:lstStyle/>
           <a:p>
-            <a:pPr algn="ctr"/>
+            <a:pPr algn="ctr">
+              <a:defRPr/>
+            </a:pPr>
           </a:p>
         </p:txBody>
       </p:sp>
@@ -6052,6 +6147,7 @@
               </a:defRPr>
             </a:pPr>
             <a:r>
+              <a:rPr/>
               <a:t>総合診療機能評価</a:t>
             </a:r>
           </a:p>
@@ -6066,7 +6162,7 @@
         <p:spPr>
           <a:xfrm>
             <a:off x="640080" y="731520"/>
-            <a:ext cx="7315200" cy="274320"/>
+            <a:ext cx="7315200" cy="322579"/>
           </a:xfrm>
           <a:prstGeom prst="rect">
             <a:avLst/>
@@ -6088,6 +6184,7 @@
               </a:defRPr>
             </a:pPr>
             <a:r>
+              <a:rPr/>
               <a:t>病院における総合診療の価値が初めて点数化</a:t>
             </a:r>
           </a:p>
@@ -6125,6 +6222,7 @@
               <a:buChar char="●"/>
             </a:pPr>
             <a:r>
+              <a:rPr/>
               <a:t>総合診療専門医の配置が評価対象に</a:t>
             </a:r>
           </a:p>
@@ -6139,6 +6237,7 @@
               <a:buChar char="●"/>
             </a:pPr>
             <a:r>
+              <a:rPr/>
               <a:t>複数診療科にまたがる患者の管理を評価</a:t>
             </a:r>
           </a:p>
@@ -6183,7 +6282,9 @@
           <a:bodyPr rtlCol="0" anchor="ctr"/>
           <a:lstStyle/>
           <a:p>
-            <a:pPr algn="ctr"/>
+            <a:pPr algn="ctr">
+              <a:defRPr/>
+            </a:pPr>
           </a:p>
         </p:txBody>
       </p:sp>
@@ -6228,7 +6329,9 @@
           <a:bodyPr rtlCol="0" anchor="ctr"/>
           <a:lstStyle/>
           <a:p>
-            <a:pPr algn="ctr"/>
+            <a:pPr algn="ctr">
+              <a:defRPr/>
+            </a:pPr>
           </a:p>
         </p:txBody>
       </p:sp>
@@ -6263,10 +6366,12 @@
               </a:defRPr>
             </a:pPr>
             <a:r>
+              <a:rPr/>
               <a:t>管理職視点: 総合診療医の採用・育成が経営戦略として浮上</a:t>
             </a:r>
             <a:br/>
             <a:r>
+              <a:rPr/>
               <a:t>かかりつけ医機能報告制度との接点も注目</a:t>
             </a:r>
           </a:p>
@@ -6337,7 +6442,9 @@
           <a:bodyPr rtlCol="0" anchor="ctr"/>
           <a:lstStyle/>
           <a:p>
-            <a:pPr algn="ctr"/>
+            <a:pPr algn="ctr">
+              <a:defRPr/>
+            </a:pPr>
           </a:p>
         </p:txBody>
       </p:sp>
@@ -6350,7 +6457,7 @@
         <p:spPr>
           <a:xfrm>
             <a:off x="640080" y="274320"/>
-            <a:ext cx="7315200" cy="457200"/>
+            <a:ext cx="7315200" cy="482600"/>
           </a:xfrm>
           <a:prstGeom prst="rect">
             <a:avLst/>
@@ -6372,6 +6479,7 @@
               </a:defRPr>
             </a:pPr>
             <a:r>
+              <a:rPr/>
               <a:t>紹介患者受入加算</a:t>
             </a:r>
           </a:p>
@@ -6416,7 +6524,9 @@
           <a:bodyPr rtlCol="0" anchor="ctr"/>
           <a:lstStyle/>
           <a:p>
-            <a:pPr algn="ctr"/>
+            <a:pPr algn="ctr">
+              <a:defRPr/>
+            </a:pPr>
           </a:p>
         </p:txBody>
       </p:sp>
@@ -6429,7 +6539,7 @@
         <p:spPr>
           <a:xfrm>
             <a:off x="2743200" y="1005840"/>
-            <a:ext cx="3657600" cy="731520"/>
+            <a:ext cx="3657600" cy="804671"/>
           </a:xfrm>
           <a:prstGeom prst="rect">
             <a:avLst/>
@@ -6451,6 +6561,7 @@
               </a:defRPr>
             </a:pPr>
             <a:r>
+              <a:rPr/>
               <a:t>60点</a:t>
             </a:r>
           </a:p>
@@ -6465,7 +6576,7 @@
         <p:spPr>
           <a:xfrm>
             <a:off x="2743200" y="1828800"/>
-            <a:ext cx="3657600" cy="365760"/>
+            <a:ext cx="3657600" cy="375920"/>
           </a:xfrm>
           <a:prstGeom prst="rect">
             <a:avLst/>
@@ -6487,6 +6598,7 @@
               </a:defRPr>
             </a:pPr>
             <a:r>
+              <a:rPr/>
               <a:t>新設</a:t>
             </a:r>
           </a:p>
@@ -6524,6 +6636,7 @@
               <a:buChar char="●"/>
             </a:pPr>
             <a:r>
+              <a:rPr/>
               <a:t>逆紹介の推進（大病院→診療所の流れ）</a:t>
             </a:r>
           </a:p>
@@ -6538,6 +6651,7 @@
               <a:buChar char="●"/>
             </a:pPr>
             <a:r>
+              <a:rPr/>
               <a:t>紹介状なし受診の抑制策と連動</a:t>
             </a:r>
           </a:p>
@@ -6582,7 +6696,9 @@
           <a:bodyPr rtlCol="0" anchor="ctr"/>
           <a:lstStyle/>
           <a:p>
-            <a:pPr algn="ctr"/>
+            <a:pPr algn="ctr">
+              <a:defRPr/>
+            </a:pPr>
           </a:p>
         </p:txBody>
       </p:sp>
@@ -6627,7 +6743,9 @@
           <a:bodyPr rtlCol="0" anchor="ctr"/>
           <a:lstStyle/>
           <a:p>
-            <a:pPr algn="ctr"/>
+            <a:pPr algn="ctr">
+              <a:defRPr/>
+            </a:pPr>
           </a:p>
         </p:txBody>
       </p:sp>
@@ -6639,7 +6757,7 @@
         </p:nvSpPr>
         <p:spPr>
           <a:xfrm>
-            <a:off x="868680" y="4279392"/>
+            <a:off x="868680" y="4407407"/>
             <a:ext cx="7863840" cy="310896"/>
           </a:xfrm>
           <a:prstGeom prst="rect">
@@ -6662,6 +6780,7 @@
               </a:defRPr>
             </a:pPr>
             <a:r>
+              <a:rPr/>
               <a:t>管理職視点: 連携パスの整備が収益に直結</a:t>
             </a:r>
           </a:p>
@@ -6732,7 +6851,9 @@
           <a:bodyPr rtlCol="0" anchor="ctr"/>
           <a:lstStyle/>
           <a:p>
-            <a:pPr algn="ctr"/>
+            <a:pPr algn="ctr">
+              <a:defRPr/>
+            </a:pPr>
           </a:p>
         </p:txBody>
       </p:sp>
@@ -6745,7 +6866,7 @@
         <p:spPr>
           <a:xfrm>
             <a:off x="640080" y="274320"/>
-            <a:ext cx="7315200" cy="457200"/>
+            <a:ext cx="7315200" cy="482600"/>
           </a:xfrm>
           <a:prstGeom prst="rect">
             <a:avLst/>
@@ -6767,6 +6888,7 @@
               </a:defRPr>
             </a:pPr>
             <a:r>
+              <a:rPr/>
               <a:t>救急の体制加算化</a:t>
             </a:r>
           </a:p>
@@ -6811,7 +6933,9 @@
           <a:bodyPr rtlCol="0" anchor="ctr"/>
           <a:lstStyle/>
           <a:p>
-            <a:pPr algn="ctr"/>
+            <a:pPr algn="ctr">
+              <a:defRPr/>
+            </a:pPr>
           </a:p>
         </p:txBody>
       </p:sp>
@@ -6846,6 +6970,7 @@
               </a:defRPr>
             </a:pPr>
             <a:r>
+              <a:rPr/>
               <a:t>旧: 院内トリアージ実施料</a:t>
             </a:r>
           </a:p>
@@ -6882,6 +7007,7 @@
               </a:defRPr>
             </a:pPr>
             <a:r>
+              <a:rPr/>
               <a:t>実施ベースの評価</a:t>
             </a:r>
           </a:p>
@@ -6896,7 +7022,7 @@
         <p:spPr>
           <a:xfrm>
             <a:off x="4389120" y="1280160"/>
-            <a:ext cx="457200" cy="548640"/>
+            <a:ext cx="457200" cy="589279"/>
           </a:xfrm>
           <a:prstGeom prst="rect">
             <a:avLst/>
@@ -6918,6 +7044,7 @@
               </a:defRPr>
             </a:pPr>
             <a:r>
+              <a:rPr/>
               <a:t>→</a:t>
             </a:r>
           </a:p>
@@ -6962,7 +7089,9 @@
           <a:bodyPr rtlCol="0" anchor="ctr"/>
           <a:lstStyle/>
           <a:p>
-            <a:pPr algn="ctr"/>
+            <a:pPr algn="ctr">
+              <a:defRPr/>
+            </a:pPr>
           </a:p>
         </p:txBody>
       </p:sp>
@@ -6997,6 +7126,7 @@
               </a:defRPr>
             </a:pPr>
             <a:r>
+              <a:rPr/>
               <a:t>新: 救急医療管理加算</a:t>
             </a:r>
           </a:p>
@@ -7033,10 +7163,12 @@
               </a:defRPr>
             </a:pPr>
             <a:r>
+              <a:rPr/>
               <a:t>体制ベースへの転換</a:t>
             </a:r>
             <a:br/>
             <a:r>
+              <a:rPr/>
               <a:t>時間帯別段階評価</a:t>
             </a:r>
           </a:p>
@@ -7081,7 +7213,9 @@
           <a:bodyPr rtlCol="0" anchor="ctr"/>
           <a:lstStyle/>
           <a:p>
-            <a:pPr algn="ctr"/>
+            <a:pPr algn="ctr">
+              <a:defRPr/>
+            </a:pPr>
           </a:p>
         </p:txBody>
       </p:sp>
@@ -7126,7 +7260,9 @@
           <a:bodyPr rtlCol="0" anchor="ctr"/>
           <a:lstStyle/>
           <a:p>
-            <a:pPr algn="ctr"/>
+            <a:pPr algn="ctr">
+              <a:defRPr/>
+            </a:pPr>
           </a:p>
         </p:txBody>
       </p:sp>
@@ -7161,6 +7297,7 @@
               </a:defRPr>
             </a:pPr>
             <a:r>
+              <a:rPr/>
               <a:t>管理職視点: 救急受入体制の整備が安定収入源に</a:t>
             </a:r>
           </a:p>
@@ -7231,7 +7368,9 @@
           <a:bodyPr rtlCol="0" anchor="ctr"/>
           <a:lstStyle/>
           <a:p>
-            <a:pPr algn="ctr"/>
+            <a:pPr algn="ctr">
+              <a:defRPr/>
+            </a:pPr>
           </a:p>
         </p:txBody>
       </p:sp>
@@ -7266,6 +7405,7 @@
               </a:defRPr>
             </a:pPr>
             <a:r>
+              <a:rPr/>
               <a:t>Section 3</a:t>
             </a:r>
           </a:p>
@@ -7280,7 +7420,7 @@
         <p:spPr>
           <a:xfrm>
             <a:off x="640080" y="548640"/>
-            <a:ext cx="7315200" cy="548640"/>
+            <a:ext cx="7315200" cy="553720"/>
           </a:xfrm>
           <a:prstGeom prst="rect">
             <a:avLst/>
@@ -7302,6 +7442,7 @@
               </a:defRPr>
             </a:pPr>
             <a:r>
+              <a:rPr/>
               <a:t>医療DX改定</a:t>
             </a:r>
           </a:p>
@@ -7346,7 +7487,9 @@
           <a:bodyPr rtlCol="0" anchor="ctr"/>
           <a:lstStyle/>
           <a:p>
-            <a:pPr algn="ctr"/>
+            <a:pPr algn="ctr">
+              <a:defRPr/>
+            </a:pPr>
           </a:p>
         </p:txBody>
       </p:sp>
@@ -7391,7 +7534,9 @@
           <a:bodyPr rtlCol="0" anchor="ctr"/>
           <a:lstStyle/>
           <a:p>
-            <a:pPr algn="ctr"/>
+            <a:pPr algn="ctr">
+              <a:defRPr/>
+            </a:pPr>
           </a:p>
         </p:txBody>
       </p:sp>
@@ -7426,10 +7571,12 @@
               </a:defRPr>
             </a:pPr>
             <a:r>
+              <a:rPr/>
               <a:t>「体制整備」から「実績評価」へ</a:t>
             </a:r>
             <a:br/>
             <a:r>
+              <a:rPr/>
               <a:t>体制があるだけでは不十分、使われていることが必要</a:t>
             </a:r>
           </a:p>
@@ -7500,7 +7647,9 @@
           <a:bodyPr rtlCol="0" anchor="ctr"/>
           <a:lstStyle/>
           <a:p>
-            <a:pPr algn="ctr"/>
+            <a:pPr algn="ctr">
+              <a:defRPr/>
+            </a:pPr>
           </a:p>
         </p:txBody>
       </p:sp>
@@ -7513,7 +7662,7 @@
         <p:spPr>
           <a:xfrm>
             <a:off x="640080" y="274320"/>
-            <a:ext cx="7315200" cy="457200"/>
+            <a:ext cx="7315200" cy="482600"/>
           </a:xfrm>
           <a:prstGeom prst="rect">
             <a:avLst/>
@@ -7535,6 +7684,7 @@
               </a:defRPr>
             </a:pPr>
             <a:r>
+              <a:rPr/>
               <a:t>本日の学習目標</a:t>
             </a:r>
           </a:p>
@@ -7581,7 +7731,9 @@
           <a:bodyPr rtlCol="0" anchor="ctr"/>
           <a:lstStyle/>
           <a:p>
-            <a:pPr algn="ctr"/>
+            <a:pPr algn="ctr">
+              <a:defRPr/>
+            </a:pPr>
           </a:p>
         </p:txBody>
       </p:sp>
@@ -7594,7 +7746,7 @@
         <p:spPr>
           <a:xfrm>
             <a:off x="914400" y="1143000"/>
-            <a:ext cx="1828800" cy="365760"/>
+            <a:ext cx="1828800" cy="375920"/>
           </a:xfrm>
           <a:prstGeom prst="rect">
             <a:avLst/>
@@ -7616,6 +7768,7 @@
               </a:defRPr>
             </a:pPr>
             <a:r>
+              <a:rPr/>
               <a:t>分析できる</a:t>
             </a:r>
           </a:p>
@@ -7652,6 +7805,7 @@
               </a:defRPr>
             </a:pPr>
             <a:r>
+              <a:rPr/>
               <a:t>改定の構造的背景と4つの柱の相互関係を説明できる</a:t>
             </a:r>
           </a:p>
@@ -7698,7 +7852,9 @@
           <a:bodyPr rtlCol="0" anchor="ctr"/>
           <a:lstStyle/>
           <a:p>
-            <a:pPr algn="ctr"/>
+            <a:pPr algn="ctr">
+              <a:defRPr/>
+            </a:pPr>
           </a:p>
         </p:txBody>
       </p:sp>
@@ -7711,7 +7867,7 @@
         <p:spPr>
           <a:xfrm>
             <a:off x="914400" y="2240279"/>
-            <a:ext cx="1828800" cy="365760"/>
+            <a:ext cx="1828800" cy="375920"/>
           </a:xfrm>
           <a:prstGeom prst="rect">
             <a:avLst/>
@@ -7733,6 +7889,7 @@
               </a:defRPr>
             </a:pPr>
             <a:r>
+              <a:rPr/>
               <a:t>評価できる</a:t>
             </a:r>
           </a:p>
@@ -7769,6 +7926,7 @@
               </a:defRPr>
             </a:pPr>
             <a:r>
+              <a:rPr/>
               <a:t>自院への影響を定量的に判断できる</a:t>
             </a:r>
           </a:p>
@@ -7815,7 +7973,9 @@
           <a:bodyPr rtlCol="0" anchor="ctr"/>
           <a:lstStyle/>
           <a:p>
-            <a:pPr algn="ctr"/>
+            <a:pPr algn="ctr">
+              <a:defRPr/>
+            </a:pPr>
           </a:p>
         </p:txBody>
       </p:sp>
@@ -7828,7 +7988,7 @@
         <p:spPr>
           <a:xfrm>
             <a:off x="914400" y="3337559"/>
-            <a:ext cx="1828800" cy="365760"/>
+            <a:ext cx="1828800" cy="375920"/>
           </a:xfrm>
           <a:prstGeom prst="rect">
             <a:avLst/>
@@ -7850,6 +8010,7 @@
               </a:defRPr>
             </a:pPr>
             <a:r>
+              <a:rPr/>
               <a:t>創造できる</a:t>
             </a:r>
           </a:p>
@@ -7886,6 +8047,7 @@
               </a:defRPr>
             </a:pPr>
             <a:r>
+              <a:rPr/>
               <a:t>施設基準取得・維持の戦略ロードマップを立案できる</a:t>
             </a:r>
           </a:p>
@@ -7922,6 +8084,7 @@
               </a:defRPr>
             </a:pPr>
             <a:r>
+              <a:rPr/>
               <a:t>ブルームの分類法: 分析→評価→創造</a:t>
             </a:r>
           </a:p>
@@ -7992,7 +8155,9 @@
           <a:bodyPr rtlCol="0" anchor="ctr"/>
           <a:lstStyle/>
           <a:p>
-            <a:pPr algn="ctr"/>
+            <a:pPr algn="ctr">
+              <a:defRPr/>
+            </a:pPr>
           </a:p>
         </p:txBody>
       </p:sp>
@@ -8005,7 +8170,7 @@
         <p:spPr>
           <a:xfrm>
             <a:off x="640080" y="274320"/>
-            <a:ext cx="7315200" cy="457200"/>
+            <a:ext cx="7315200" cy="482600"/>
           </a:xfrm>
           <a:prstGeom prst="rect">
             <a:avLst/>
@@ -8027,6 +8192,7 @@
               </a:defRPr>
             </a:pPr>
             <a:r>
+              <a:rPr/>
               <a:t>旧制度→新制度の統合</a:t>
             </a:r>
           </a:p>
@@ -8071,7 +8237,9 @@
           <a:bodyPr rtlCol="0" anchor="ctr"/>
           <a:lstStyle/>
           <a:p>
-            <a:pPr algn="ctr"/>
+            <a:pPr algn="ctr">
+              <a:defRPr/>
+            </a:pPr>
           </a:p>
         </p:txBody>
       </p:sp>
@@ -8106,6 +8274,7 @@
               </a:defRPr>
             </a:pPr>
             <a:r>
+              <a:rPr/>
               <a:t>廃止</a:t>
             </a:r>
           </a:p>
@@ -8142,10 +8311,12 @@
               </a:defRPr>
             </a:pPr>
             <a:r>
+              <a:rPr/>
               <a:t>医療DX推進体制</a:t>
             </a:r>
             <a:br/>
             <a:r>
+              <a:rPr/>
               <a:t>整備加算</a:t>
             </a:r>
           </a:p>
@@ -8190,7 +8361,9 @@
           <a:bodyPr rtlCol="0" anchor="ctr"/>
           <a:lstStyle/>
           <a:p>
-            <a:pPr algn="ctr"/>
+            <a:pPr algn="ctr">
+              <a:defRPr/>
+            </a:pPr>
           </a:p>
         </p:txBody>
       </p:sp>
@@ -8225,6 +8398,7 @@
               </a:defRPr>
             </a:pPr>
             <a:r>
+              <a:rPr/>
               <a:t>廃止</a:t>
             </a:r>
           </a:p>
@@ -8261,6 +8435,7 @@
               </a:defRPr>
             </a:pPr>
             <a:r>
+              <a:rPr/>
               <a:t>医療情報取得加算</a:t>
             </a:r>
           </a:p>
@@ -8297,6 +8472,7 @@
               </a:defRPr>
             </a:pPr>
             <a:r>
+              <a:rPr/>
               <a:t>→</a:t>
             </a:r>
           </a:p>
@@ -8341,7 +8517,9 @@
           <a:bodyPr rtlCol="0" anchor="ctr"/>
           <a:lstStyle/>
           <a:p>
-            <a:pPr algn="ctr"/>
+            <a:pPr algn="ctr">
+              <a:defRPr/>
+            </a:pPr>
           </a:p>
         </p:txBody>
       </p:sp>
@@ -8354,7 +8532,7 @@
         <p:spPr>
           <a:xfrm>
             <a:off x="4572000" y="960120"/>
-            <a:ext cx="4389120" cy="274320"/>
+            <a:ext cx="4389120" cy="287020"/>
           </a:xfrm>
           <a:prstGeom prst="rect">
             <a:avLst/>
@@ -8376,6 +8554,7 @@
               </a:defRPr>
             </a:pPr>
             <a:r>
+              <a:rPr/>
               <a:t>統合</a:t>
             </a:r>
           </a:p>
@@ -8412,10 +8591,12 @@
               </a:defRPr>
             </a:pPr>
             <a:r>
+              <a:rPr/>
               <a:t>電子的診療情報</a:t>
             </a:r>
             <a:br/>
             <a:r>
+              <a:rPr/>
               <a:t>連携体制整備加算</a:t>
             </a:r>
           </a:p>
@@ -8452,6 +8633,7 @@
               </a:defRPr>
             </a:pPr>
             <a:r>
+              <a:rPr/>
               <a:t>3区分（15 / 9 / 4 点）</a:t>
             </a:r>
           </a:p>
@@ -8522,7 +8704,9 @@
           <a:bodyPr rtlCol="0" anchor="ctr"/>
           <a:lstStyle/>
           <a:p>
-            <a:pPr algn="ctr"/>
+            <a:pPr algn="ctr">
+              <a:defRPr/>
+            </a:pPr>
           </a:p>
         </p:txBody>
       </p:sp>
@@ -8535,7 +8719,7 @@
         <p:spPr>
           <a:xfrm>
             <a:off x="640080" y="274320"/>
-            <a:ext cx="7315200" cy="457200"/>
+            <a:ext cx="7315200" cy="482600"/>
           </a:xfrm>
           <a:prstGeom prst="rect">
             <a:avLst/>
@@ -8557,6 +8741,7 @@
               </a:defRPr>
             </a:pPr>
             <a:r>
+              <a:rPr/>
               <a:t>電子的診療情報連携の3区分</a:t>
             </a:r>
           </a:p>
@@ -8601,7 +8786,9 @@
           <a:bodyPr rtlCol="0" anchor="ctr"/>
           <a:lstStyle/>
           <a:p>
-            <a:pPr algn="ctr"/>
+            <a:pPr algn="ctr">
+              <a:defRPr/>
+            </a:pPr>
           </a:p>
         </p:txBody>
       </p:sp>
@@ -8636,6 +8823,7 @@
               </a:defRPr>
             </a:pPr>
             <a:r>
+              <a:rPr/>
               <a:t>区分1</a:t>
             </a:r>
           </a:p>
@@ -8649,8 +8837,8 @@
         </p:nvSpPr>
         <p:spPr>
           <a:xfrm>
-            <a:off x="457200" y="1280160"/>
-            <a:ext cx="2651760" cy="548640"/>
+            <a:off x="457200" y="1298448"/>
+            <a:ext cx="2651760" cy="621792"/>
           </a:xfrm>
           <a:prstGeom prst="rect">
             <a:avLst/>
@@ -8672,6 +8860,7 @@
               </a:defRPr>
             </a:pPr>
             <a:r>
+              <a:rPr/>
               <a:t>15点</a:t>
             </a:r>
           </a:p>
@@ -8708,10 +8897,12 @@
               </a:defRPr>
             </a:pPr>
             <a:r>
+              <a:rPr/>
               <a:t>電子処方箋実績</a:t>
             </a:r>
             <a:br/>
             <a:r>
+              <a:rPr/>
               <a:t>+ マイナ利用率30%以上</a:t>
             </a:r>
           </a:p>
@@ -8756,7 +8947,9 @@
           <a:bodyPr rtlCol="0" anchor="ctr"/>
           <a:lstStyle/>
           <a:p>
-            <a:pPr algn="ctr"/>
+            <a:pPr algn="ctr">
+              <a:defRPr/>
+            </a:pPr>
           </a:p>
         </p:txBody>
       </p:sp>
@@ -8791,6 +8984,7 @@
               </a:defRPr>
             </a:pPr>
             <a:r>
+              <a:rPr/>
               <a:t>区分2</a:t>
             </a:r>
           </a:p>
@@ -8804,8 +8998,8 @@
         </p:nvSpPr>
         <p:spPr>
           <a:xfrm>
-            <a:off x="3383280" y="1280160"/>
-            <a:ext cx="2651760" cy="548640"/>
+            <a:off x="3383280" y="1298448"/>
+            <a:ext cx="2651760" cy="621792"/>
           </a:xfrm>
           <a:prstGeom prst="rect">
             <a:avLst/>
@@ -8827,6 +9021,7 @@
               </a:defRPr>
             </a:pPr>
             <a:r>
+              <a:rPr/>
               <a:t>9点</a:t>
             </a:r>
           </a:p>
@@ -8863,10 +9058,12 @@
               </a:defRPr>
             </a:pPr>
             <a:r>
+              <a:rPr/>
               <a:t>電子処方箋</a:t>
             </a:r>
             <a:br/>
             <a:r>
+              <a:rPr/>
               <a:t>体制あり</a:t>
             </a:r>
           </a:p>
@@ -8911,7 +9108,9 @@
           <a:bodyPr rtlCol="0" anchor="ctr"/>
           <a:lstStyle/>
           <a:p>
-            <a:pPr algn="ctr"/>
+            <a:pPr algn="ctr">
+              <a:defRPr/>
+            </a:pPr>
           </a:p>
         </p:txBody>
       </p:sp>
@@ -8946,6 +9145,7 @@
               </a:defRPr>
             </a:pPr>
             <a:r>
+              <a:rPr/>
               <a:t>区分3</a:t>
             </a:r>
           </a:p>
@@ -8959,8 +9159,8 @@
         </p:nvSpPr>
         <p:spPr>
           <a:xfrm>
-            <a:off x="6309360" y="1280160"/>
-            <a:ext cx="2651760" cy="548640"/>
+            <a:off x="6309360" y="1298448"/>
+            <a:ext cx="2651760" cy="621792"/>
           </a:xfrm>
           <a:prstGeom prst="rect">
             <a:avLst/>
@@ -8982,6 +9182,7 @@
               </a:defRPr>
             </a:pPr>
             <a:r>
+              <a:rPr/>
               <a:t>4点</a:t>
             </a:r>
           </a:p>
@@ -9018,10 +9219,12 @@
               </a:defRPr>
             </a:pPr>
             <a:r>
+              <a:rPr/>
               <a:t>マイナ基本体制</a:t>
             </a:r>
             <a:br/>
             <a:r>
+              <a:rPr/>
               <a:t>のみ</a:t>
             </a:r>
           </a:p>
@@ -9066,7 +9269,9 @@
           <a:bodyPr rtlCol="0" anchor="ctr"/>
           <a:lstStyle/>
           <a:p>
-            <a:pPr algn="ctr"/>
+            <a:pPr algn="ctr">
+              <a:defRPr/>
+            </a:pPr>
           </a:p>
         </p:txBody>
       </p:sp>
@@ -9111,7 +9316,9 @@
           <a:bodyPr rtlCol="0" anchor="ctr"/>
           <a:lstStyle/>
           <a:p>
-            <a:pPr algn="ctr"/>
+            <a:pPr algn="ctr">
+              <a:defRPr/>
+            </a:pPr>
           </a:p>
         </p:txBody>
       </p:sp>
@@ -9146,10 +9353,12 @@
               </a:defRPr>
             </a:pPr>
             <a:r>
+              <a:rPr/>
               <a:t>区分1 vs 区分3 = 11点/回の差</a:t>
             </a:r>
             <a:br/>
             <a:r>
+              <a:rPr/>
               <a:t>1日100人で年間約400万円の差</a:t>
             </a:r>
           </a:p>
@@ -9220,7 +9429,9 @@
           <a:bodyPr rtlCol="0" anchor="ctr"/>
           <a:lstStyle/>
           <a:p>
-            <a:pPr algn="ctr"/>
+            <a:pPr algn="ctr">
+              <a:defRPr/>
+            </a:pPr>
           </a:p>
         </p:txBody>
       </p:sp>
@@ -9233,7 +9444,7 @@
         <p:spPr>
           <a:xfrm>
             <a:off x="640080" y="274320"/>
-            <a:ext cx="7315200" cy="457200"/>
+            <a:ext cx="7315200" cy="482600"/>
           </a:xfrm>
           <a:prstGeom prst="rect">
             <a:avLst/>
@@ -9255,6 +9466,7 @@
               </a:defRPr>
             </a:pPr>
             <a:r>
+              <a:rPr/>
               <a:t>マイナ保険証利用率30%の壁</a:t>
             </a:r>
           </a:p>
@@ -9299,7 +9511,9 @@
           <a:bodyPr rtlCol="0" anchor="ctr"/>
           <a:lstStyle/>
           <a:p>
-            <a:pPr algn="ctr"/>
+            <a:pPr algn="ctr">
+              <a:defRPr/>
+            </a:pPr>
           </a:p>
         </p:txBody>
       </p:sp>
@@ -9312,7 +9526,7 @@
         <p:spPr>
           <a:xfrm>
             <a:off x="2743200" y="1005840"/>
-            <a:ext cx="3657600" cy="731520"/>
+            <a:ext cx="3657600" cy="804671"/>
           </a:xfrm>
           <a:prstGeom prst="rect">
             <a:avLst/>
@@ -9334,6 +9548,7 @@
               </a:defRPr>
             </a:pPr>
             <a:r>
+              <a:rPr/>
               <a:t>30%</a:t>
             </a:r>
           </a:p>
@@ -9370,6 +9585,7 @@
               </a:defRPr>
             </a:pPr>
             <a:r>
+              <a:rPr/>
               <a:t>区分1取得の必須ライン</a:t>
             </a:r>
           </a:p>
@@ -9384,7 +9600,7 @@
         <p:spPr>
           <a:xfrm>
             <a:off x="640080" y="2926080"/>
-            <a:ext cx="7315200" cy="274320"/>
+            <a:ext cx="7315200" cy="304799"/>
           </a:xfrm>
           <a:prstGeom prst="rect">
             <a:avLst/>
@@ -9406,6 +9622,7 @@
               </a:defRPr>
             </a:pPr>
             <a:r>
+              <a:rPr/>
               <a:t>全国平均（2026年3月時点）: 約15-20%</a:t>
             </a:r>
           </a:p>
@@ -9420,7 +9637,7 @@
         <p:spPr>
           <a:xfrm>
             <a:off x="640080" y="3383280"/>
-            <a:ext cx="3657600" cy="274320"/>
+            <a:ext cx="3657600" cy="322579"/>
           </a:xfrm>
           <a:prstGeom prst="rect">
             <a:avLst/>
@@ -9442,6 +9659,7 @@
               </a:defRPr>
             </a:pPr>
             <a:r>
+              <a:rPr/>
               <a:t>施設でできること</a:t>
             </a:r>
           </a:p>
@@ -9479,6 +9697,7 @@
               <a:buChar char="●"/>
             </a:pPr>
             <a:r>
+              <a:rPr/>
               <a:t>受付でのマイナ保険証利用促進</a:t>
             </a:r>
           </a:p>
@@ -9493,6 +9712,7 @@
               <a:buChar char="●"/>
             </a:pPr>
             <a:r>
+              <a:rPr/>
               <a:t>ポスター掲示・声かけマニュアル</a:t>
             </a:r>
           </a:p>
@@ -9507,6 +9727,7 @@
               <a:buChar char="●"/>
             </a:pPr>
             <a:r>
+              <a:rPr/>
               <a:t>カードリーダーの動線最適化</a:t>
             </a:r>
           </a:p>
@@ -9577,7 +9798,9 @@
           <a:bodyPr rtlCol="0" anchor="ctr"/>
           <a:lstStyle/>
           <a:p>
-            <a:pPr algn="ctr"/>
+            <a:pPr algn="ctr">
+              <a:defRPr/>
+            </a:pPr>
           </a:p>
         </p:txBody>
       </p:sp>
@@ -9590,7 +9813,7 @@
         <p:spPr>
           <a:xfrm>
             <a:off x="640080" y="274320"/>
-            <a:ext cx="7315200" cy="457200"/>
+            <a:ext cx="7315200" cy="482600"/>
           </a:xfrm>
           <a:prstGeom prst="rect">
             <a:avLst/>
@@ -9612,6 +9835,7 @@
               </a:defRPr>
             </a:pPr>
             <a:r>
+              <a:rPr/>
               <a:t>電子処方箋の要件</a:t>
             </a:r>
           </a:p>
@@ -9656,7 +9880,9 @@
           <a:bodyPr rtlCol="0" anchor="ctr"/>
           <a:lstStyle/>
           <a:p>
-            <a:pPr algn="ctr"/>
+            <a:pPr algn="ctr">
+              <a:defRPr/>
+            </a:pPr>
           </a:p>
         </p:txBody>
       </p:sp>
@@ -9701,7 +9927,9 @@
           <a:bodyPr rtlCol="0" anchor="ctr"/>
           <a:lstStyle/>
           <a:p>
-            <a:pPr algn="ctr"/>
+            <a:pPr algn="ctr">
+              <a:defRPr/>
+            </a:pPr>
           </a:p>
         </p:txBody>
       </p:sp>
@@ -9714,7 +9942,7 @@
         <p:spPr>
           <a:xfrm>
             <a:off x="868680" y="987552"/>
-            <a:ext cx="7863840" cy="310896"/>
+            <a:ext cx="7863840" cy="340360"/>
           </a:xfrm>
           <a:prstGeom prst="rect">
             <a:avLst/>
@@ -9736,6 +9964,7 @@
               </a:defRPr>
             </a:pPr>
             <a:r>
+              <a:rPr/>
               <a:t>電子処方箋: もはや「対応済み」が前提</a:t>
             </a:r>
           </a:p>
@@ -9773,6 +10002,7 @@
               <a:buChar char="●"/>
             </a:pPr>
             <a:r>
+              <a:rPr/>
               <a:t>区分1・2の取得には電子処方箋が必須</a:t>
             </a:r>
           </a:p>
@@ -9787,6 +10017,7 @@
               <a:buChar char="●"/>
             </a:pPr>
             <a:r>
+              <a:rPr/>
               <a:t>導入コスト vs 長期的な加算収入</a:t>
             </a:r>
           </a:p>
@@ -9831,7 +10062,9 @@
           <a:bodyPr rtlCol="0" anchor="ctr"/>
           <a:lstStyle/>
           <a:p>
-            <a:pPr algn="ctr"/>
+            <a:pPr algn="ctr">
+              <a:defRPr/>
+            </a:pPr>
           </a:p>
         </p:txBody>
       </p:sp>
@@ -9876,7 +10109,9 @@
           <a:bodyPr rtlCol="0" anchor="ctr"/>
           <a:lstStyle/>
           <a:p>
-            <a:pPr algn="ctr"/>
+            <a:pPr algn="ctr">
+              <a:defRPr/>
+            </a:pPr>
           </a:p>
         </p:txBody>
       </p:sp>
@@ -9911,6 +10146,7 @@
               </a:defRPr>
             </a:pPr>
             <a:r>
+              <a:rPr/>
               <a:t>管理職視点: 未導入なら最優先で導入計画を策定</a:t>
             </a:r>
           </a:p>
@@ -9981,7 +10217,9 @@
           <a:bodyPr rtlCol="0" anchor="ctr"/>
           <a:lstStyle/>
           <a:p>
-            <a:pPr algn="ctr"/>
+            <a:pPr algn="ctr">
+              <a:defRPr/>
+            </a:pPr>
           </a:p>
         </p:txBody>
       </p:sp>
@@ -10016,6 +10254,7 @@
               </a:defRPr>
             </a:pPr>
             <a:r>
+              <a:rPr/>
               <a:t>Section 4</a:t>
             </a:r>
           </a:p>
@@ -10030,7 +10269,7 @@
         <p:spPr>
           <a:xfrm>
             <a:off x="640080" y="548640"/>
-            <a:ext cx="7315200" cy="548640"/>
+            <a:ext cx="7315200" cy="553720"/>
           </a:xfrm>
           <a:prstGeom prst="rect">
             <a:avLst/>
@@ -10052,6 +10291,7 @@
               </a:defRPr>
             </a:pPr>
             <a:r>
+              <a:rPr/>
               <a:t>BCP策定義務化</a:t>
             </a:r>
           </a:p>
@@ -10096,7 +10336,9 @@
           <a:bodyPr rtlCol="0" anchor="ctr"/>
           <a:lstStyle/>
           <a:p>
-            <a:pPr algn="ctr"/>
+            <a:pPr algn="ctr">
+              <a:defRPr/>
+            </a:pPr>
           </a:p>
         </p:txBody>
       </p:sp>
@@ -10141,7 +10383,9 @@
           <a:bodyPr rtlCol="0" anchor="ctr"/>
           <a:lstStyle/>
           <a:p>
-            <a:pPr algn="ctr"/>
+            <a:pPr algn="ctr">
+              <a:defRPr/>
+            </a:pPr>
           </a:p>
         </p:txBody>
       </p:sp>
@@ -10176,6 +10420,7 @@
               </a:defRPr>
             </a:pPr>
             <a:r>
+              <a:rPr/>
               <a:t>もう「あると良い」ではなく「なければ算定不可」</a:t>
             </a:r>
           </a:p>
@@ -10220,7 +10465,9 @@
           <a:bodyPr rtlCol="0" anchor="ctr"/>
           <a:lstStyle/>
           <a:p>
-            <a:pPr algn="ctr"/>
+            <a:pPr algn="ctr">
+              <a:defRPr/>
+            </a:pPr>
           </a:p>
         </p:txBody>
       </p:sp>
@@ -10255,6 +10502,7 @@
               </a:defRPr>
             </a:pPr>
             <a:r>
+              <a:rPr/>
               <a:t>期限: 2027年5月31日</a:t>
             </a:r>
           </a:p>
@@ -10291,6 +10539,7 @@
               </a:defRPr>
             </a:pPr>
             <a:r>
+              <a:rPr/>
               <a:t>機能強化加算・在支診・在支病の施設基準</a:t>
             </a:r>
           </a:p>
@@ -10361,7 +10610,9 @@
           <a:bodyPr rtlCol="0" anchor="ctr"/>
           <a:lstStyle/>
           <a:p>
-            <a:pPr algn="ctr"/>
+            <a:pPr algn="ctr">
+              <a:defRPr/>
+            </a:pPr>
           </a:p>
         </p:txBody>
       </p:sp>
@@ -10396,6 +10647,7 @@
               </a:defRPr>
             </a:pPr>
             <a:r>
+              <a:rPr/>
               <a:t>自然災害BCP チェックリスト</a:t>
             </a:r>
           </a:p>
@@ -10410,7 +10662,7 @@
         <p:spPr>
           <a:xfrm>
             <a:off x="640080" y="731520"/>
-            <a:ext cx="7315200" cy="274320"/>
+            <a:ext cx="7315200" cy="322579"/>
           </a:xfrm>
           <a:prstGeom prst="rect">
             <a:avLst/>
@@ -10432,6 +10684,7 @@
               </a:defRPr>
             </a:pPr>
             <a:r>
+              <a:rPr/>
               <a:t>7つの策定項目</a:t>
             </a:r>
           </a:p>
@@ -10469,6 +10722,7 @@
               <a:buChar char="●"/>
             </a:pPr>
             <a:r>
+              <a:rPr/>
               <a:t>優先業務の特定と順位付け</a:t>
             </a:r>
           </a:p>
@@ -10483,6 +10737,7 @@
               <a:buChar char="●"/>
             </a:pPr>
             <a:r>
+              <a:rPr/>
               <a:t>職員参集計画（連絡網・代替手段）</a:t>
             </a:r>
           </a:p>
@@ -10497,6 +10752,7 @@
               <a:buChar char="●"/>
             </a:pPr>
             <a:r>
+              <a:rPr/>
               <a:t>患者安全確保手順</a:t>
             </a:r>
           </a:p>
@@ -10511,6 +10767,7 @@
               <a:buChar char="●"/>
             </a:pPr>
             <a:r>
+              <a:rPr/>
               <a:t>ライフライン途絶時の対応</a:t>
             </a:r>
           </a:p>
@@ -10525,6 +10782,7 @@
               <a:buChar char="●"/>
             </a:pPr>
             <a:r>
+              <a:rPr/>
               <a:t>備蓄計画（医薬品・食料・燃料）</a:t>
             </a:r>
           </a:p>
@@ -10539,6 +10797,7 @@
               <a:buChar char="●"/>
             </a:pPr>
             <a:r>
+              <a:rPr/>
               <a:t>地域連携体制（受入・搬送）</a:t>
             </a:r>
           </a:p>
@@ -10553,6 +10812,7 @@
               <a:buChar char="●"/>
             </a:pPr>
             <a:r>
+              <a:rPr/>
               <a:t>年1回以上の訓練実施</a:t>
             </a:r>
           </a:p>
@@ -10623,7 +10883,9 @@
           <a:bodyPr rtlCol="0" anchor="ctr"/>
           <a:lstStyle/>
           <a:p>
-            <a:pPr algn="ctr"/>
+            <a:pPr algn="ctr">
+              <a:defRPr/>
+            </a:pPr>
           </a:p>
         </p:txBody>
       </p:sp>
@@ -10658,6 +10920,7 @@
               </a:defRPr>
             </a:pPr>
             <a:r>
+              <a:rPr/>
               <a:t>サイバーセキュリティBCP</a:t>
             </a:r>
           </a:p>
@@ -10702,7 +10965,9 @@
           <a:bodyPr rtlCol="0" anchor="ctr"/>
           <a:lstStyle/>
           <a:p>
-            <a:pPr algn="ctr"/>
+            <a:pPr algn="ctr">
+              <a:defRPr/>
+            </a:pPr>
           </a:p>
         </p:txBody>
       </p:sp>
@@ -10715,7 +10980,7 @@
         <p:spPr>
           <a:xfrm>
             <a:off x="5029200" y="320040"/>
-            <a:ext cx="3657600" cy="274320"/>
+            <a:ext cx="3657600" cy="301751"/>
           </a:xfrm>
           <a:prstGeom prst="rect">
             <a:avLst/>
@@ -10737,6 +11002,7 @@
               </a:defRPr>
             </a:pPr>
             <a:r>
+              <a:rPr/>
               <a:t>2024年だけで33件</a:t>
             </a:r>
           </a:p>
@@ -10750,7 +11016,7 @@
         </p:nvSpPr>
         <p:spPr>
           <a:xfrm>
-            <a:off x="5029200" y="640080"/>
+            <a:off x="5029200" y="749808"/>
             <a:ext cx="3657600" cy="274320"/>
           </a:xfrm>
           <a:prstGeom prst="rect">
@@ -10773,6 +11039,7 @@
               </a:defRPr>
             </a:pPr>
             <a:r>
+              <a:rPr/>
               <a:t>医療機関へのサイバー攻撃</a:t>
             </a:r>
           </a:p>
@@ -10810,6 +11077,7 @@
               <a:buChar char="●"/>
             </a:pPr>
             <a:r>
+              <a:rPr/>
               <a:t>バックアップ体制（3-2-1ルール）</a:t>
             </a:r>
           </a:p>
@@ -10824,6 +11092,7 @@
               <a:buChar char="●"/>
             </a:pPr>
             <a:r>
+              <a:rPr/>
               <a:t>ランサムウェア対策（ネットワーク分離）</a:t>
             </a:r>
           </a:p>
@@ -10838,6 +11107,7 @@
               <a:buChar char="●"/>
             </a:pPr>
             <a:r>
+              <a:rPr/>
               <a:t>紙カルテ運用への切り替え手順</a:t>
             </a:r>
           </a:p>
@@ -10852,6 +11122,7 @@
               <a:buChar char="●"/>
             </a:pPr>
             <a:r>
+              <a:rPr/>
               <a:t>全職員向けセキュリティ教育（年1回以上）</a:t>
             </a:r>
           </a:p>
@@ -10866,6 +11137,7 @@
               <a:buChar char="●"/>
             </a:pPr>
             <a:r>
+              <a:rPr/>
               <a:t>インシデント発生時の報告・対応フロー</a:t>
             </a:r>
           </a:p>
@@ -10936,7 +11208,9 @@
           <a:bodyPr rtlCol="0" anchor="ctr"/>
           <a:lstStyle/>
           <a:p>
-            <a:pPr algn="ctr"/>
+            <a:pPr algn="ctr">
+              <a:defRPr/>
+            </a:pPr>
           </a:p>
         </p:txBody>
       </p:sp>
@@ -10971,6 +11245,7 @@
               </a:defRPr>
             </a:pPr>
             <a:r>
+              <a:rPr/>
               <a:t>Section 5</a:t>
             </a:r>
           </a:p>
@@ -11007,6 +11282,7 @@
               </a:defRPr>
             </a:pPr>
             <a:r>
+              <a:rPr/>
               <a:t>経営戦略</a:t>
             </a:r>
           </a:p>
@@ -11021,7 +11297,7 @@
         <p:spPr>
           <a:xfrm>
             <a:off x="640080" y="1097280"/>
-            <a:ext cx="7315200" cy="274320"/>
+            <a:ext cx="7315200" cy="322579"/>
           </a:xfrm>
           <a:prstGeom prst="rect">
             <a:avLst/>
@@ -11043,6 +11319,7 @@
               </a:defRPr>
             </a:pPr>
             <a:r>
+              <a:rPr/>
               <a:t>自院への影響をどう評価するか</a:t>
             </a:r>
           </a:p>
@@ -11089,7 +11366,9 @@
           <a:bodyPr rtlCol="0" anchor="ctr"/>
           <a:lstStyle/>
           <a:p>
-            <a:pPr algn="ctr"/>
+            <a:pPr algn="ctr">
+              <a:defRPr/>
+            </a:pPr>
           </a:p>
         </p:txBody>
       </p:sp>
@@ -11124,6 +11403,7 @@
               </a:defRPr>
             </a:pPr>
             <a:r>
+              <a:rPr/>
               <a:t>Step 1</a:t>
             </a:r>
           </a:p>
@@ -11160,6 +11440,7 @@
               </a:defRPr>
             </a:pPr>
             <a:r>
+              <a:rPr/>
               <a:t>現在の施設基準一覧を棚卸し</a:t>
             </a:r>
           </a:p>
@@ -11206,7 +11487,9 @@
           <a:bodyPr rtlCol="0" anchor="ctr"/>
           <a:lstStyle/>
           <a:p>
-            <a:pPr algn="ctr"/>
+            <a:pPr algn="ctr">
+              <a:defRPr/>
+            </a:pPr>
           </a:p>
         </p:txBody>
       </p:sp>
@@ -11241,6 +11524,7 @@
               </a:defRPr>
             </a:pPr>
             <a:r>
+              <a:rPr/>
               <a:t>Step 2</a:t>
             </a:r>
           </a:p>
@@ -11277,6 +11561,7 @@
               </a:defRPr>
             </a:pPr>
             <a:r>
+              <a:rPr/>
               <a:t>改定後の点数変動をシミュレーション</a:t>
             </a:r>
           </a:p>
@@ -11323,7 +11608,9 @@
           <a:bodyPr rtlCol="0" anchor="ctr"/>
           <a:lstStyle/>
           <a:p>
-            <a:pPr algn="ctr"/>
+            <a:pPr algn="ctr">
+              <a:defRPr/>
+            </a:pPr>
           </a:p>
         </p:txBody>
       </p:sp>
@@ -11358,6 +11645,7 @@
               </a:defRPr>
             </a:pPr>
             <a:r>
+              <a:rPr/>
               <a:t>Step 3</a:t>
             </a:r>
           </a:p>
@@ -11394,6 +11682,7 @@
               </a:defRPr>
             </a:pPr>
             <a:r>
+              <a:rPr/>
               <a:t>新規取得可能な施設基準を洗い出し</a:t>
             </a:r>
           </a:p>
@@ -11440,7 +11729,9 @@
           <a:bodyPr rtlCol="0" anchor="ctr"/>
           <a:lstStyle/>
           <a:p>
-            <a:pPr algn="ctr"/>
+            <a:pPr algn="ctr">
+              <a:defRPr/>
+            </a:pPr>
           </a:p>
         </p:txBody>
       </p:sp>
@@ -11475,6 +11766,7 @@
               </a:defRPr>
             </a:pPr>
             <a:r>
+              <a:rPr/>
               <a:t>Step 4</a:t>
             </a:r>
           </a:p>
@@ -11511,6 +11803,7 @@
               </a:defRPr>
             </a:pPr>
             <a:r>
+              <a:rPr/>
               <a:t>投資対効果（ROI）で優先順位づけ</a:t>
             </a:r>
           </a:p>
@@ -11581,7 +11874,9 @@
           <a:bodyPr rtlCol="0" anchor="ctr"/>
           <a:lstStyle/>
           <a:p>
-            <a:pPr algn="ctr"/>
+            <a:pPr algn="ctr">
+              <a:defRPr/>
+            </a:pPr>
           </a:p>
         </p:txBody>
       </p:sp>
@@ -11594,7 +11889,7 @@
         <p:spPr>
           <a:xfrm>
             <a:off x="640080" y="274320"/>
-            <a:ext cx="7315200" cy="457200"/>
+            <a:ext cx="7315200" cy="482600"/>
           </a:xfrm>
           <a:prstGeom prst="rect">
             <a:avLst/>
@@ -11616,6 +11911,7 @@
               </a:defRPr>
             </a:pPr>
             <a:r>
+              <a:rPr/>
               <a:t>施設基準 優先度マトリクス</a:t>
             </a:r>
           </a:p>
@@ -11660,7 +11956,9 @@
           <a:bodyPr rtlCol="0" anchor="ctr"/>
           <a:lstStyle/>
           <a:p>
-            <a:pPr algn="ctr"/>
+            <a:pPr algn="ctr">
+              <a:defRPr/>
+            </a:pPr>
           </a:p>
         </p:txBody>
       </p:sp>
@@ -11695,6 +11993,7 @@
               </a:defRPr>
             </a:pPr>
             <a:r>
+              <a:rPr/>
               <a:t>緊急度高 × 効果大</a:t>
             </a:r>
           </a:p>
@@ -11731,10 +12030,12 @@
               </a:defRPr>
             </a:pPr>
             <a:r>
+              <a:rPr/>
               <a:t>BCP策定（期限あり）</a:t>
             </a:r>
             <a:br/>
             <a:r>
+              <a:rPr/>
               <a:t>ベースアップ評価料申請</a:t>
             </a:r>
           </a:p>
@@ -11781,7 +12082,9 @@
           <a:bodyPr rtlCol="0" anchor="ctr"/>
           <a:lstStyle/>
           <a:p>
-            <a:pPr algn="ctr"/>
+            <a:pPr algn="ctr">
+              <a:defRPr/>
+            </a:pPr>
           </a:p>
         </p:txBody>
       </p:sp>
@@ -11816,6 +12119,7 @@
               </a:defRPr>
             </a:pPr>
             <a:r>
+              <a:rPr/>
               <a:t>緊急度低 × 効果大</a:t>
             </a:r>
           </a:p>
@@ -11852,10 +12156,12 @@
               </a:defRPr>
             </a:pPr>
             <a:r>
+              <a:rPr/>
               <a:t>電子処方箋導入</a:t>
             </a:r>
             <a:br/>
             <a:r>
+              <a:rPr/>
               <a:t>地域包括診療加算1</a:t>
             </a:r>
           </a:p>
@@ -11900,7 +12206,9 @@
           <a:bodyPr rtlCol="0" anchor="ctr"/>
           <a:lstStyle/>
           <a:p>
-            <a:pPr algn="ctr"/>
+            <a:pPr algn="ctr">
+              <a:defRPr/>
+            </a:pPr>
           </a:p>
         </p:txBody>
       </p:sp>
@@ -11935,6 +12243,7 @@
               </a:defRPr>
             </a:pPr>
             <a:r>
+              <a:rPr/>
               <a:t>緊急度高 × 効果小</a:t>
             </a:r>
           </a:p>
@@ -11971,6 +12280,7 @@
               </a:defRPr>
             </a:pPr>
             <a:r>
+              <a:rPr/>
               <a:t>物価対応料の届出</a:t>
             </a:r>
           </a:p>
@@ -12015,7 +12325,9 @@
           <a:bodyPr rtlCol="0" anchor="ctr"/>
           <a:lstStyle/>
           <a:p>
-            <a:pPr algn="ctr"/>
+            <a:pPr algn="ctr">
+              <a:defRPr/>
+            </a:pPr>
           </a:p>
         </p:txBody>
       </p:sp>
@@ -12050,6 +12362,7 @@
               </a:defRPr>
             </a:pPr>
             <a:r>
+              <a:rPr/>
               <a:t>緊急度低 × 効果小</a:t>
             </a:r>
           </a:p>
@@ -12086,6 +12399,7 @@
               </a:defRPr>
             </a:pPr>
             <a:r>
+              <a:rPr/>
               <a:t>その他の加算見直し</a:t>
             </a:r>
           </a:p>
@@ -12156,7 +12470,9 @@
           <a:bodyPr rtlCol="0" anchor="ctr"/>
           <a:lstStyle/>
           <a:p>
-            <a:pPr algn="ctr"/>
+            <a:pPr algn="ctr">
+              <a:defRPr/>
+            </a:pPr>
           </a:p>
         </p:txBody>
       </p:sp>
@@ -12169,7 +12485,7 @@
         <p:spPr>
           <a:xfrm>
             <a:off x="640080" y="274320"/>
-            <a:ext cx="7315200" cy="457200"/>
+            <a:ext cx="7315200" cy="482600"/>
           </a:xfrm>
           <a:prstGeom prst="rect">
             <a:avLst/>
@@ -12191,6 +12507,7 @@
               </a:defRPr>
             </a:pPr>
             <a:r>
+              <a:rPr/>
               <a:t>全職員への伝え方</a:t>
             </a:r>
           </a:p>
@@ -12235,7 +12552,9 @@
           <a:bodyPr rtlCol="0" anchor="ctr"/>
           <a:lstStyle/>
           <a:p>
-            <a:pPr algn="ctr"/>
+            <a:pPr algn="ctr">
+              <a:defRPr/>
+            </a:pPr>
           </a:p>
         </p:txBody>
       </p:sp>
@@ -12280,7 +12599,9 @@
           <a:bodyPr rtlCol="0" anchor="ctr"/>
           <a:lstStyle/>
           <a:p>
-            <a:pPr algn="ctr"/>
+            <a:pPr algn="ctr">
+              <a:defRPr/>
+            </a:pPr>
           </a:p>
         </p:txBody>
       </p:sp>
@@ -12293,7 +12614,7 @@
         <p:spPr>
           <a:xfrm>
             <a:off x="868680" y="896112"/>
-            <a:ext cx="7863840" cy="310896"/>
+            <a:ext cx="7863840" cy="340360"/>
           </a:xfrm>
           <a:prstGeom prst="rect">
             <a:avLst/>
@@ -12315,6 +12636,7 @@
               </a:defRPr>
             </a:pPr>
             <a:r>
+              <a:rPr/>
               <a:t>「改定は経営の話」で終わらせない</a:t>
             </a:r>
           </a:p>
@@ -12361,7 +12683,9 @@
           <a:bodyPr rtlCol="0" anchor="ctr"/>
           <a:lstStyle/>
           <a:p>
-            <a:pPr algn="ctr"/>
+            <a:pPr algn="ctr">
+              <a:defRPr/>
+            </a:pPr>
           </a:p>
         </p:txBody>
       </p:sp>
@@ -12396,6 +12720,7 @@
               </a:defRPr>
             </a:pPr>
             <a:r>
+              <a:rPr/>
               <a:t>ベースアップ評価料</a:t>
             </a:r>
           </a:p>
@@ -12432,6 +12757,7 @@
               </a:defRPr>
             </a:pPr>
             <a:r>
+              <a:rPr/>
               <a:t>「あなたの給与に直結します」</a:t>
             </a:r>
           </a:p>
@@ -12478,7 +12804,9 @@
           <a:bodyPr rtlCol="0" anchor="ctr"/>
           <a:lstStyle/>
           <a:p>
-            <a:pPr algn="ctr"/>
+            <a:pPr algn="ctr">
+              <a:defRPr/>
+            </a:pPr>
           </a:p>
         </p:txBody>
       </p:sp>
@@ -12513,6 +12841,7 @@
               </a:defRPr>
             </a:pPr>
             <a:r>
+              <a:rPr/>
               <a:t>マイナ保険証利用促進</a:t>
             </a:r>
           </a:p>
@@ -12549,6 +12878,7 @@
               </a:defRPr>
             </a:pPr>
             <a:r>
+              <a:rPr/>
               <a:t>「受付での声かけが収入を変えます」</a:t>
             </a:r>
           </a:p>
@@ -12595,7 +12925,9 @@
           <a:bodyPr rtlCol="0" anchor="ctr"/>
           <a:lstStyle/>
           <a:p>
-            <a:pPr algn="ctr"/>
+            <a:pPr algn="ctr">
+              <a:defRPr/>
+            </a:pPr>
           </a:p>
         </p:txBody>
       </p:sp>
@@ -12630,6 +12962,7 @@
               </a:defRPr>
             </a:pPr>
             <a:r>
+              <a:rPr/>
               <a:t>BCP</a:t>
             </a:r>
           </a:p>
@@ -12666,6 +12999,7 @@
               </a:defRPr>
             </a:pPr>
             <a:r>
+              <a:rPr/>
               <a:t>「あなたと患者を守る計画です」</a:t>
             </a:r>
           </a:p>
@@ -12702,6 +13036,7 @@
               </a:defRPr>
             </a:pPr>
             <a:r>
+              <a:rPr/>
               <a:t>事務部門・看護部門・リハビリ部門それぞれの伝え方を変える</a:t>
             </a:r>
           </a:p>
@@ -12772,7 +13107,9 @@
           <a:bodyPr rtlCol="0" anchor="ctr"/>
           <a:lstStyle/>
           <a:p>
-            <a:pPr algn="ctr"/>
+            <a:pPr algn="ctr">
+              <a:defRPr/>
+            </a:pPr>
           </a:p>
         </p:txBody>
       </p:sp>
@@ -12807,6 +13144,7 @@
               </a:defRPr>
             </a:pPr>
             <a:r>
+              <a:rPr/>
               <a:t>改定の歴史的位置づけ</a:t>
             </a:r>
           </a:p>
@@ -12821,7 +13159,7 @@
         <p:spPr>
           <a:xfrm>
             <a:off x="640080" y="731520"/>
-            <a:ext cx="7315200" cy="274320"/>
+            <a:ext cx="7315200" cy="322579"/>
           </a:xfrm>
           <a:prstGeom prst="rect">
             <a:avLst/>
@@ -12843,6 +13181,7 @@
               </a:defRPr>
             </a:pPr>
             <a:r>
+              <a:rPr/>
               <a:t>30年ぶりの大幅プラス改定</a:t>
             </a:r>
           </a:p>
@@ -12887,7 +13226,9 @@
           <a:bodyPr rtlCol="0" anchor="ctr"/>
           <a:lstStyle/>
           <a:p>
-            <a:pPr algn="ctr"/>
+            <a:pPr algn="ctr">
+              <a:defRPr/>
+            </a:pPr>
           </a:p>
         </p:txBody>
       </p:sp>
@@ -12900,7 +13241,7 @@
         <p:spPr>
           <a:xfrm>
             <a:off x="914400" y="1371600"/>
-            <a:ext cx="1828800" cy="274320"/>
+            <a:ext cx="1828800" cy="340360"/>
           </a:xfrm>
           <a:prstGeom prst="rect">
             <a:avLst/>
@@ -12922,6 +13263,7 @@
               </a:defRPr>
             </a:pPr>
             <a:r>
+              <a:rPr/>
               <a:t>2024年</a:t>
             </a:r>
           </a:p>
@@ -12936,7 +13278,7 @@
         <p:spPr>
           <a:xfrm>
             <a:off x="2743200" y="1325880"/>
-            <a:ext cx="1828800" cy="365760"/>
+            <a:ext cx="1828800" cy="375920"/>
           </a:xfrm>
           <a:prstGeom prst="rect">
             <a:avLst/>
@@ -12958,6 +13300,7 @@
               </a:defRPr>
             </a:pPr>
             <a:r>
+              <a:rPr/>
               <a:t>+0.88%</a:t>
             </a:r>
           </a:p>
@@ -12972,7 +13315,7 @@
         <p:spPr>
           <a:xfrm>
             <a:off x="5029200" y="1417319"/>
-            <a:ext cx="2743200" cy="274320"/>
+            <a:ext cx="2743200" cy="287020"/>
           </a:xfrm>
           <a:prstGeom prst="rect">
             <a:avLst/>
@@ -12994,6 +13337,7 @@
               </a:defRPr>
             </a:pPr>
             <a:r>
+              <a:rPr/>
               <a:t>本体+0.46%</a:t>
             </a:r>
           </a:p>
@@ -13038,7 +13382,9 @@
           <a:bodyPr rtlCol="0" anchor="ctr"/>
           <a:lstStyle/>
           <a:p>
-            <a:pPr algn="ctr"/>
+            <a:pPr algn="ctr">
+              <a:defRPr/>
+            </a:pPr>
           </a:p>
         </p:txBody>
       </p:sp>
@@ -13051,7 +13397,7 @@
         <p:spPr>
           <a:xfrm>
             <a:off x="914400" y="2286000"/>
-            <a:ext cx="1828800" cy="274320"/>
+            <a:ext cx="1828800" cy="340360"/>
           </a:xfrm>
           <a:prstGeom prst="rect">
             <a:avLst/>
@@ -13073,6 +13419,7 @@
               </a:defRPr>
             </a:pPr>
             <a:r>
+              <a:rPr/>
               <a:t>2026年</a:t>
             </a:r>
           </a:p>
@@ -13087,7 +13434,7 @@
         <p:spPr>
           <a:xfrm>
             <a:off x="2743200" y="2240279"/>
-            <a:ext cx="1828800" cy="365760"/>
+            <a:ext cx="1828800" cy="518159"/>
           </a:xfrm>
           <a:prstGeom prst="rect">
             <a:avLst/>
@@ -13109,6 +13456,7 @@
               </a:defRPr>
             </a:pPr>
             <a:r>
+              <a:rPr/>
               <a:t>+3.09%</a:t>
             </a:r>
           </a:p>
@@ -13123,7 +13471,7 @@
         <p:spPr>
           <a:xfrm>
             <a:off x="5029200" y="2331720"/>
-            <a:ext cx="2743200" cy="274320"/>
+            <a:ext cx="2743200" cy="287020"/>
           </a:xfrm>
           <a:prstGeom prst="rect">
             <a:avLst/>
@@ -13145,6 +13493,7 @@
               </a:defRPr>
             </a:pPr>
             <a:r>
+              <a:rPr/>
               <a:t>30年ぶり</a:t>
             </a:r>
           </a:p>
@@ -13189,7 +13538,9 @@
           <a:bodyPr rtlCol="0" anchor="ctr"/>
           <a:lstStyle/>
           <a:p>
-            <a:pPr algn="ctr"/>
+            <a:pPr algn="ctr">
+              <a:defRPr/>
+            </a:pPr>
           </a:p>
         </p:txBody>
       </p:sp>
@@ -13202,7 +13553,7 @@
         <p:spPr>
           <a:xfrm>
             <a:off x="914400" y="3200400"/>
-            <a:ext cx="1828800" cy="274320"/>
+            <a:ext cx="1828800" cy="340360"/>
           </a:xfrm>
           <a:prstGeom prst="rect">
             <a:avLst/>
@@ -13224,6 +13575,7 @@
               </a:defRPr>
             </a:pPr>
             <a:r>
+              <a:rPr/>
               <a:t>1994年</a:t>
             </a:r>
           </a:p>
@@ -13238,7 +13590,7 @@
         <p:spPr>
           <a:xfrm>
             <a:off x="2743200" y="3154679"/>
-            <a:ext cx="1828800" cy="365760"/>
+            <a:ext cx="1828800" cy="375920"/>
           </a:xfrm>
           <a:prstGeom prst="rect">
             <a:avLst/>
@@ -13260,6 +13612,7 @@
               </a:defRPr>
             </a:pPr>
             <a:r>
+              <a:rPr/>
               <a:t>+3.4%</a:t>
             </a:r>
           </a:p>
@@ -13274,7 +13627,7 @@
         <p:spPr>
           <a:xfrm>
             <a:off x="5029200" y="3246120"/>
-            <a:ext cx="2743200" cy="274320"/>
+            <a:ext cx="2743200" cy="287020"/>
           </a:xfrm>
           <a:prstGeom prst="rect">
             <a:avLst/>
@@ -13296,6 +13649,7 @@
               </a:defRPr>
             </a:pPr>
             <a:r>
+              <a:rPr/>
               <a:t>過去最大</a:t>
             </a:r>
           </a:p>
@@ -13340,7 +13694,9 @@
           <a:bodyPr rtlCol="0" anchor="ctr"/>
           <a:lstStyle/>
           <a:p>
-            <a:pPr algn="ctr"/>
+            <a:pPr algn="ctr">
+              <a:defRPr/>
+            </a:pPr>
           </a:p>
         </p:txBody>
       </p:sp>
@@ -13385,7 +13741,9 @@
           <a:bodyPr rtlCol="0" anchor="ctr"/>
           <a:lstStyle/>
           <a:p>
-            <a:pPr algn="ctr"/>
+            <a:pPr algn="ctr">
+              <a:defRPr/>
+            </a:pPr>
           </a:p>
         </p:txBody>
       </p:sp>
@@ -13420,6 +13778,7 @@
               </a:defRPr>
             </a:pPr>
             <a:r>
+              <a:rPr/>
               <a:t>なぜ今、30年ぶりの引き上げが必要になったのか？</a:t>
             </a:r>
           </a:p>
@@ -13490,7 +13849,9 @@
           <a:bodyPr rtlCol="0" anchor="ctr"/>
           <a:lstStyle/>
           <a:p>
-            <a:pPr algn="ctr"/>
+            <a:pPr algn="ctr">
+              <a:defRPr/>
+            </a:pPr>
           </a:p>
         </p:txBody>
       </p:sp>
@@ -13503,7 +13864,7 @@
         <p:spPr>
           <a:xfrm>
             <a:off x="640080" y="274320"/>
-            <a:ext cx="7315200" cy="457200"/>
+            <a:ext cx="7315200" cy="482600"/>
           </a:xfrm>
           <a:prstGeom prst="rect">
             <a:avLst/>
@@ -13525,6 +13886,7 @@
               </a:defRPr>
             </a:pPr>
             <a:r>
+              <a:rPr/>
               <a:t>今日から始める5つのアクション</a:t>
             </a:r>
           </a:p>
@@ -13571,7 +13933,9 @@
           <a:bodyPr rtlCol="0" anchor="ctr"/>
           <a:lstStyle/>
           <a:p>
-            <a:pPr algn="ctr"/>
+            <a:pPr algn="ctr">
+              <a:defRPr/>
+            </a:pPr>
           </a:p>
         </p:txBody>
       </p:sp>
@@ -13584,7 +13948,7 @@
         <p:spPr>
           <a:xfrm>
             <a:off x="822960" y="868680"/>
-            <a:ext cx="1645920" cy="274320"/>
+            <a:ext cx="1645920" cy="304799"/>
           </a:xfrm>
           <a:prstGeom prst="rect">
             <a:avLst/>
@@ -13606,6 +13970,7 @@
               </a:defRPr>
             </a:pPr>
             <a:r>
+              <a:rPr/>
               <a:t>今週中</a:t>
             </a:r>
           </a:p>
@@ -13642,6 +14007,7 @@
               </a:defRPr>
             </a:pPr>
             <a:r>
+              <a:rPr/>
               <a:t>施設基準の棚卸し（現状把握）</a:t>
             </a:r>
           </a:p>
@@ -13688,7 +14054,9 @@
           <a:bodyPr rtlCol="0" anchor="ctr"/>
           <a:lstStyle/>
           <a:p>
-            <a:pPr algn="ctr"/>
+            <a:pPr algn="ctr">
+              <a:defRPr/>
+            </a:pPr>
           </a:p>
         </p:txBody>
       </p:sp>
@@ -13701,7 +14069,7 @@
         <p:spPr>
           <a:xfrm>
             <a:off x="822960" y="1600200"/>
-            <a:ext cx="1645920" cy="274320"/>
+            <a:ext cx="1645920" cy="304799"/>
           </a:xfrm>
           <a:prstGeom prst="rect">
             <a:avLst/>
@@ -13723,6 +14091,7 @@
               </a:defRPr>
             </a:pPr>
             <a:r>
+              <a:rPr/>
               <a:t>今月中</a:t>
             </a:r>
           </a:p>
@@ -13759,6 +14128,7 @@
               </a:defRPr>
             </a:pPr>
             <a:r>
+              <a:rPr/>
               <a:t>BCP策定プロジェクトチーム発足</a:t>
             </a:r>
           </a:p>
@@ -13805,7 +14175,9 @@
           <a:bodyPr rtlCol="0" anchor="ctr"/>
           <a:lstStyle/>
           <a:p>
-            <a:pPr algn="ctr"/>
+            <a:pPr algn="ctr">
+              <a:defRPr/>
+            </a:pPr>
           </a:p>
         </p:txBody>
       </p:sp>
@@ -13818,7 +14190,7 @@
         <p:spPr>
           <a:xfrm>
             <a:off x="822960" y="2331720"/>
-            <a:ext cx="1645920" cy="274320"/>
+            <a:ext cx="1645920" cy="304799"/>
           </a:xfrm>
           <a:prstGeom prst="rect">
             <a:avLst/>
@@ -13840,6 +14212,7 @@
               </a:defRPr>
             </a:pPr>
             <a:r>
+              <a:rPr/>
               <a:t>来月中</a:t>
             </a:r>
           </a:p>
@@ -13876,6 +14249,7 @@
               </a:defRPr>
             </a:pPr>
             <a:r>
+              <a:rPr/>
               <a:t>マイナ保険証利用率の現状把握と目標設定</a:t>
             </a:r>
           </a:p>
@@ -13922,7 +14296,9 @@
           <a:bodyPr rtlCol="0" anchor="ctr"/>
           <a:lstStyle/>
           <a:p>
-            <a:pPr algn="ctr"/>
+            <a:pPr algn="ctr">
+              <a:defRPr/>
+            </a:pPr>
           </a:p>
         </p:txBody>
       </p:sp>
@@ -13935,7 +14311,7 @@
         <p:spPr>
           <a:xfrm>
             <a:off x="822960" y="3063240"/>
-            <a:ext cx="1645920" cy="274320"/>
+            <a:ext cx="1645920" cy="304799"/>
           </a:xfrm>
           <a:prstGeom prst="rect">
             <a:avLst/>
@@ -13957,6 +14333,7 @@
               </a:defRPr>
             </a:pPr>
             <a:r>
+              <a:rPr/>
               <a:t>6月</a:t>
             </a:r>
           </a:p>
@@ -13993,6 +14370,7 @@
               </a:defRPr>
             </a:pPr>
             <a:r>
+              <a:rPr/>
               <a:t>改定施行 — 算定開始</a:t>
             </a:r>
           </a:p>
@@ -14039,7 +14417,9 @@
           <a:bodyPr rtlCol="0" anchor="ctr"/>
           <a:lstStyle/>
           <a:p>
-            <a:pPr algn="ctr"/>
+            <a:pPr algn="ctr">
+              <a:defRPr/>
+            </a:pPr>
           </a:p>
         </p:txBody>
       </p:sp>
@@ -14052,7 +14432,7 @@
         <p:spPr>
           <a:xfrm>
             <a:off x="822960" y="3794760"/>
-            <a:ext cx="1645920" cy="274320"/>
+            <a:ext cx="1645920" cy="304799"/>
           </a:xfrm>
           <a:prstGeom prst="rect">
             <a:avLst/>
@@ -14074,6 +14454,7 @@
               </a:defRPr>
             </a:pPr>
             <a:r>
+              <a:rPr/>
               <a:t>2027年5月</a:t>
             </a:r>
           </a:p>
@@ -14110,6 +14491,7 @@
               </a:defRPr>
             </a:pPr>
             <a:r>
+              <a:rPr/>
               <a:t>BCP経過措置期限 — 完了必須</a:t>
             </a:r>
           </a:p>
@@ -14154,7 +14536,9 @@
           <a:bodyPr rtlCol="0" anchor="ctr"/>
           <a:lstStyle/>
           <a:p>
-            <a:pPr algn="ctr"/>
+            <a:pPr algn="ctr">
+              <a:defRPr/>
+            </a:pPr>
           </a:p>
         </p:txBody>
       </p:sp>
@@ -14199,7 +14583,9 @@
           <a:bodyPr rtlCol="0" anchor="ctr"/>
           <a:lstStyle/>
           <a:p>
-            <a:pPr algn="ctr"/>
+            <a:pPr algn="ctr">
+              <a:defRPr/>
+            </a:pPr>
           </a:p>
         </p:txBody>
       </p:sp>
@@ -14234,10 +14620,12 @@
               </a:defRPr>
             </a:pPr>
             <a:r>
+              <a:rPr/>
               <a:t>自院で最もインパクトが大きい改定項目はどれか？</a:t>
             </a:r>
             <a:br/>
             <a:r>
+              <a:rPr/>
               <a:t>今日の帰りの車の中で考えてみてください。</a:t>
             </a:r>
           </a:p>
@@ -14274,6 +14662,7 @@
               </a:defRPr>
             </a:pPr>
             <a:r>
+              <a:rPr/>
               <a:t>Scribe Agent | 2026-03-28 | ガニェの9教授事象</a:t>
             </a:r>
           </a:p>
@@ -14344,7 +14733,9 @@
           <a:bodyPr rtlCol="0" anchor="ctr"/>
           <a:lstStyle/>
           <a:p>
-            <a:pPr algn="ctr"/>
+            <a:pPr algn="ctr">
+              <a:defRPr/>
+            </a:pPr>
           </a:p>
         </p:txBody>
       </p:sp>
@@ -14357,7 +14748,7 @@
         <p:spPr>
           <a:xfrm>
             <a:off x="640080" y="274320"/>
-            <a:ext cx="7315200" cy="457200"/>
+            <a:ext cx="7315200" cy="482600"/>
           </a:xfrm>
           <a:prstGeom prst="rect">
             <a:avLst/>
@@ -14379,6 +14770,7 @@
               </a:defRPr>
             </a:pPr>
             <a:r>
+              <a:rPr/>
               <a:t>改定率の内訳</a:t>
             </a:r>
           </a:p>
@@ -14425,7 +14817,9 @@
           <a:bodyPr rtlCol="0" anchor="ctr"/>
           <a:lstStyle/>
           <a:p>
-            <a:pPr algn="ctr"/>
+            <a:pPr algn="ctr">
+              <a:defRPr/>
+            </a:pPr>
           </a:p>
         </p:txBody>
       </p:sp>
@@ -14438,7 +14832,7 @@
         <p:spPr>
           <a:xfrm>
             <a:off x="914400" y="1143000"/>
-            <a:ext cx="2286000" cy="274320"/>
+            <a:ext cx="2286000" cy="304799"/>
           </a:xfrm>
           <a:prstGeom prst="rect">
             <a:avLst/>
@@ -14460,6 +14854,7 @@
               </a:defRPr>
             </a:pPr>
             <a:r>
+              <a:rPr/>
               <a:t>賃上げ対応</a:t>
             </a:r>
           </a:p>
@@ -14474,7 +14869,7 @@
         <p:spPr>
           <a:xfrm>
             <a:off x="3200400" y="1143000"/>
-            <a:ext cx="1371600" cy="274320"/>
+            <a:ext cx="1371600" cy="340360"/>
           </a:xfrm>
           <a:prstGeom prst="rect">
             <a:avLst/>
@@ -14496,6 +14891,7 @@
               </a:defRPr>
             </a:pPr>
             <a:r>
+              <a:rPr/>
               <a:t>+1.70%</a:t>
             </a:r>
           </a:p>
@@ -14532,6 +14928,7 @@
               </a:defRPr>
             </a:pPr>
             <a:r>
+              <a:rPr/>
               <a:t>約7,700億円（55%）</a:t>
             </a:r>
           </a:p>
@@ -14578,7 +14975,9 @@
           <a:bodyPr rtlCol="0" anchor="ctr"/>
           <a:lstStyle/>
           <a:p>
-            <a:pPr algn="ctr"/>
+            <a:pPr algn="ctr">
+              <a:defRPr/>
+            </a:pPr>
           </a:p>
         </p:txBody>
       </p:sp>
@@ -14591,7 +14990,7 @@
         <p:spPr>
           <a:xfrm>
             <a:off x="914400" y="2011679"/>
-            <a:ext cx="2286000" cy="274320"/>
+            <a:ext cx="2286000" cy="304799"/>
           </a:xfrm>
           <a:prstGeom prst="rect">
             <a:avLst/>
@@ -14613,6 +15012,7 @@
               </a:defRPr>
             </a:pPr>
             <a:r>
+              <a:rPr/>
               <a:t>物価高騰対応</a:t>
             </a:r>
           </a:p>
@@ -14627,7 +15027,7 @@
         <p:spPr>
           <a:xfrm>
             <a:off x="3200400" y="2011679"/>
-            <a:ext cx="1371600" cy="274320"/>
+            <a:ext cx="1371600" cy="340360"/>
           </a:xfrm>
           <a:prstGeom prst="rect">
             <a:avLst/>
@@ -14649,6 +15049,7 @@
               </a:defRPr>
             </a:pPr>
             <a:r>
+              <a:rPr/>
               <a:t>+0.76%</a:t>
             </a:r>
           </a:p>
@@ -14685,6 +15086,7 @@
               </a:defRPr>
             </a:pPr>
             <a:r>
+              <a:rPr/>
               <a:t>約3,400億円（25%）</a:t>
             </a:r>
           </a:p>
@@ -14731,7 +15133,9 @@
           <a:bodyPr rtlCol="0" anchor="ctr"/>
           <a:lstStyle/>
           <a:p>
-            <a:pPr algn="ctr"/>
+            <a:pPr algn="ctr">
+              <a:defRPr/>
+            </a:pPr>
           </a:p>
         </p:txBody>
       </p:sp>
@@ -14744,7 +15148,7 @@
         <p:spPr>
           <a:xfrm>
             <a:off x="914400" y="2880359"/>
-            <a:ext cx="2286000" cy="274320"/>
+            <a:ext cx="2286000" cy="304799"/>
           </a:xfrm>
           <a:prstGeom prst="rect">
             <a:avLst/>
@@ -14766,6 +15170,7 @@
               </a:defRPr>
             </a:pPr>
             <a:r>
+              <a:rPr/>
               <a:t>食費・光熱水費</a:t>
             </a:r>
           </a:p>
@@ -14780,7 +15185,7 @@
         <p:spPr>
           <a:xfrm>
             <a:off x="3200400" y="2880359"/>
-            <a:ext cx="1371600" cy="274320"/>
+            <a:ext cx="1371600" cy="340360"/>
           </a:xfrm>
           <a:prstGeom prst="rect">
             <a:avLst/>
@@ -14802,6 +15207,7 @@
               </a:defRPr>
             </a:pPr>
             <a:r>
+              <a:rPr/>
               <a:t>+0.09%</a:t>
             </a:r>
           </a:p>
@@ -14838,6 +15244,7 @@
               </a:defRPr>
             </a:pPr>
             <a:r>
+              <a:rPr/>
               <a:t>約400億円（3%）</a:t>
             </a:r>
           </a:p>
@@ -14884,7 +15291,9 @@
           <a:bodyPr rtlCol="0" anchor="ctr"/>
           <a:lstStyle/>
           <a:p>
-            <a:pPr algn="ctr"/>
+            <a:pPr algn="ctr">
+              <a:defRPr/>
+            </a:pPr>
           </a:p>
         </p:txBody>
       </p:sp>
@@ -14897,7 +15306,7 @@
         <p:spPr>
           <a:xfrm>
             <a:off x="914400" y="3749039"/>
-            <a:ext cx="2286000" cy="274320"/>
+            <a:ext cx="2286000" cy="304799"/>
           </a:xfrm>
           <a:prstGeom prst="rect">
             <a:avLst/>
@@ -14919,6 +15328,7 @@
               </a:defRPr>
             </a:pPr>
             <a:r>
+              <a:rPr/>
               <a:t>経営難緊急</a:t>
             </a:r>
           </a:p>
@@ -14933,7 +15343,7 @@
         <p:spPr>
           <a:xfrm>
             <a:off x="3200400" y="3749039"/>
-            <a:ext cx="1371600" cy="274320"/>
+            <a:ext cx="1371600" cy="340360"/>
           </a:xfrm>
           <a:prstGeom prst="rect">
             <a:avLst/>
@@ -14955,6 +15365,7 @@
               </a:defRPr>
             </a:pPr>
             <a:r>
+              <a:rPr/>
               <a:t>+0.44%</a:t>
             </a:r>
           </a:p>
@@ -14991,6 +15402,7 @@
               </a:defRPr>
             </a:pPr>
             <a:r>
+              <a:rPr/>
               <a:t>約2,000億円（14%）</a:t>
             </a:r>
           </a:p>
@@ -15035,7 +15447,9 @@
           <a:bodyPr rtlCol="0" anchor="ctr"/>
           <a:lstStyle/>
           <a:p>
-            <a:pPr algn="ctr"/>
+            <a:pPr algn="ctr">
+              <a:defRPr/>
+            </a:pPr>
           </a:p>
         </p:txBody>
       </p:sp>
@@ -15080,7 +15494,9 @@
           <a:bodyPr rtlCol="0" anchor="ctr"/>
           <a:lstStyle/>
           <a:p>
-            <a:pPr algn="ctr"/>
+            <a:pPr algn="ctr">
+              <a:defRPr/>
+            </a:pPr>
           </a:p>
         </p:txBody>
       </p:sp>
@@ -15093,7 +15509,7 @@
         <p:spPr>
           <a:xfrm>
             <a:off x="868680" y="4645152"/>
-            <a:ext cx="7863840" cy="219456"/>
+            <a:ext cx="7863840" cy="287020"/>
           </a:xfrm>
           <a:prstGeom prst="rect">
             <a:avLst/>
@@ -15115,6 +15531,7 @@
               </a:defRPr>
             </a:pPr>
             <a:r>
+              <a:rPr/>
               <a:t>改定の半分以上（55%）が「賃上げ」— これは政策的メッセージ</a:t>
             </a:r>
           </a:p>
@@ -15185,7 +15602,9 @@
           <a:bodyPr rtlCol="0" anchor="ctr"/>
           <a:lstStyle/>
           <a:p>
-            <a:pPr algn="ctr"/>
+            <a:pPr algn="ctr">
+              <a:defRPr/>
+            </a:pPr>
           </a:p>
         </p:txBody>
       </p:sp>
@@ -15198,7 +15617,7 @@
         <p:spPr>
           <a:xfrm>
             <a:off x="640080" y="274320"/>
-            <a:ext cx="7315200" cy="457200"/>
+            <a:ext cx="7315200" cy="482600"/>
           </a:xfrm>
           <a:prstGeom prst="rect">
             <a:avLst/>
@@ -15220,6 +15639,7 @@
               </a:defRPr>
             </a:pPr>
             <a:r>
+              <a:rPr/>
               <a:t>改定の4本柱</a:t>
             </a:r>
           </a:p>
@@ -15264,7 +15684,9 @@
           <a:bodyPr rtlCol="0" anchor="ctr"/>
           <a:lstStyle/>
           <a:p>
-            <a:pPr algn="ctr"/>
+            <a:pPr algn="ctr">
+              <a:defRPr/>
+            </a:pPr>
           </a:p>
         </p:txBody>
       </p:sp>
@@ -15277,7 +15699,7 @@
         <p:spPr>
           <a:xfrm>
             <a:off x="457200" y="1005840"/>
-            <a:ext cx="1965960" cy="457200"/>
+            <a:ext cx="1965960" cy="530351"/>
           </a:xfrm>
           <a:prstGeom prst="rect">
             <a:avLst/>
@@ -15299,6 +15721,7 @@
               </a:defRPr>
             </a:pPr>
             <a:r>
+              <a:rPr/>
               <a:t>1</a:t>
             </a:r>
           </a:p>
@@ -15335,6 +15758,7 @@
               </a:defRPr>
             </a:pPr>
             <a:r>
+              <a:rPr/>
               <a:t>賃上げ・物価対応</a:t>
             </a:r>
           </a:p>
@@ -15371,10 +15795,12 @@
               </a:defRPr>
             </a:pPr>
             <a:r>
+              <a:rPr/>
               <a:t>ベースアップ評価料拡充</a:t>
             </a:r>
             <a:br/>
             <a:r>
+              <a:rPr/>
               <a:t>物価対応料新設</a:t>
             </a:r>
           </a:p>
@@ -15419,7 +15845,9 @@
           <a:bodyPr rtlCol="0" anchor="ctr"/>
           <a:lstStyle/>
           <a:p>
-            <a:pPr algn="ctr"/>
+            <a:pPr algn="ctr">
+              <a:defRPr/>
+            </a:pPr>
           </a:p>
         </p:txBody>
       </p:sp>
@@ -15432,7 +15860,7 @@
         <p:spPr>
           <a:xfrm>
             <a:off x="2606040" y="1005840"/>
-            <a:ext cx="1965960" cy="457200"/>
+            <a:ext cx="1965960" cy="530351"/>
           </a:xfrm>
           <a:prstGeom prst="rect">
             <a:avLst/>
@@ -15454,6 +15882,7 @@
               </a:defRPr>
             </a:pPr>
             <a:r>
+              <a:rPr/>
               <a:t>2</a:t>
             </a:r>
           </a:p>
@@ -15490,6 +15919,7 @@
               </a:defRPr>
             </a:pPr>
             <a:r>
+              <a:rPr/>
               <a:t>医療DX推進</a:t>
             </a:r>
           </a:p>
@@ -15526,10 +15956,12 @@
               </a:defRPr>
             </a:pPr>
             <a:r>
+              <a:rPr/>
               <a:t>旧加算廃止→</a:t>
             </a:r>
             <a:br/>
             <a:r>
+              <a:rPr/>
               <a:t>電子的診療情報連携に統合</a:t>
             </a:r>
           </a:p>
@@ -15574,7 +16006,9 @@
           <a:bodyPr rtlCol="0" anchor="ctr"/>
           <a:lstStyle/>
           <a:p>
-            <a:pPr algn="ctr"/>
+            <a:pPr algn="ctr">
+              <a:defRPr/>
+            </a:pPr>
           </a:p>
         </p:txBody>
       </p:sp>
@@ -15587,7 +16021,7 @@
         <p:spPr>
           <a:xfrm>
             <a:off x="4754880" y="1005840"/>
-            <a:ext cx="1965960" cy="457200"/>
+            <a:ext cx="1965960" cy="530351"/>
           </a:xfrm>
           <a:prstGeom prst="rect">
             <a:avLst/>
@@ -15609,6 +16043,7 @@
               </a:defRPr>
             </a:pPr>
             <a:r>
+              <a:rPr/>
               <a:t>3</a:t>
             </a:r>
           </a:p>
@@ -15645,10 +16080,12 @@
               </a:defRPr>
             </a:pPr>
             <a:r>
+              <a:rPr/>
               <a:t>かかりつけ医</a:t>
             </a:r>
             <a:br/>
             <a:r>
+              <a:rPr/>
               <a:t>機能強化</a:t>
             </a:r>
           </a:p>
@@ -15685,10 +16122,12 @@
               </a:defRPr>
             </a:pPr>
             <a:r>
+              <a:rPr/>
               <a:t>地域包括診療加算再編</a:t>
             </a:r>
             <a:br/>
             <a:r>
+              <a:rPr/>
               <a:t>生活習慣病管理料</a:t>
             </a:r>
           </a:p>
@@ -15733,7 +16172,9 @@
           <a:bodyPr rtlCol="0" anchor="ctr"/>
           <a:lstStyle/>
           <a:p>
-            <a:pPr algn="ctr"/>
+            <a:pPr algn="ctr">
+              <a:defRPr/>
+            </a:pPr>
           </a:p>
         </p:txBody>
       </p:sp>
@@ -15746,7 +16187,7 @@
         <p:spPr>
           <a:xfrm>
             <a:off x="6903720" y="1005840"/>
-            <a:ext cx="1965960" cy="457200"/>
+            <a:ext cx="1965960" cy="530351"/>
           </a:xfrm>
           <a:prstGeom prst="rect">
             <a:avLst/>
@@ -15768,6 +16209,7 @@
               </a:defRPr>
             </a:pPr>
             <a:r>
+              <a:rPr/>
               <a:t>4</a:t>
             </a:r>
           </a:p>
@@ -15804,6 +16246,7 @@
               </a:defRPr>
             </a:pPr>
             <a:r>
+              <a:rPr/>
               <a:t>急性期再編</a:t>
             </a:r>
           </a:p>
@@ -15840,10 +16283,12 @@
               </a:defRPr>
             </a:pPr>
             <a:r>
+              <a:rPr/>
               <a:t>地域包括医療病棟6区分化</a:t>
             </a:r>
             <a:br/>
             <a:r>
+              <a:rPr/>
               <a:t>救急体制加算化</a:t>
             </a:r>
           </a:p>
@@ -15914,7 +16359,9 @@
           <a:bodyPr rtlCol="0" anchor="ctr"/>
           <a:lstStyle/>
           <a:p>
-            <a:pPr algn="ctr"/>
+            <a:pPr algn="ctr">
+              <a:defRPr/>
+            </a:pPr>
           </a:p>
         </p:txBody>
       </p:sp>
@@ -15949,6 +16396,7 @@
               </a:defRPr>
             </a:pPr>
             <a:r>
+              <a:rPr/>
               <a:t>Section 1</a:t>
             </a:r>
           </a:p>
@@ -15985,6 +16433,7 @@
               </a:defRPr>
             </a:pPr>
             <a:r>
+              <a:rPr/>
               <a:t>外来改定のポイント</a:t>
             </a:r>
           </a:p>
@@ -15999,7 +16448,7 @@
         <p:spPr>
           <a:xfrm>
             <a:off x="640080" y="1097280"/>
-            <a:ext cx="7315200" cy="274320"/>
+            <a:ext cx="7315200" cy="322579"/>
           </a:xfrm>
           <a:prstGeom prst="rect">
             <a:avLst/>
@@ -16021,6 +16470,7 @@
               </a:defRPr>
             </a:pPr>
             <a:r>
+              <a:rPr/>
               <a:t>6つの主要変更を押さえる</a:t>
             </a:r>
           </a:p>
@@ -16058,6 +16508,7 @@
               <a:buChar char="●"/>
             </a:pPr>
             <a:r>
+              <a:rPr/>
               <a:t>再診料の引き上げ（75→76点）</a:t>
             </a:r>
           </a:p>
@@ -16072,6 +16523,7 @@
               <a:buChar char="●"/>
             </a:pPr>
             <a:r>
+              <a:rPr/>
               <a:t>機能強化加算 + BCP義務化</a:t>
             </a:r>
           </a:p>
@@ -16086,6 +16538,7 @@
               <a:buChar char="●"/>
             </a:pPr>
             <a:r>
+              <a:rPr/>
               <a:t>地域包括診療加算の再編（2区分化）</a:t>
             </a:r>
           </a:p>
@@ -16100,6 +16553,7 @@
               <a:buChar char="●"/>
             </a:pPr>
             <a:r>
+              <a:rPr/>
               <a:t>生活習慣病管理料の変更（多科連携）</a:t>
             </a:r>
           </a:p>
@@ -16114,6 +16568,7 @@
               <a:buChar char="●"/>
             </a:pPr>
             <a:r>
+              <a:rPr/>
               <a:t>ベースアップ評価料の拡充（6→17点）</a:t>
             </a:r>
           </a:p>
@@ -16128,6 +16583,7 @@
               <a:buChar char="●"/>
             </a:pPr>
             <a:r>
+              <a:rPr/>
               <a:t>物価対応料の新設</a:t>
             </a:r>
           </a:p>
@@ -16198,7 +16654,9 @@
           <a:bodyPr rtlCol="0" anchor="ctr"/>
           <a:lstStyle/>
           <a:p>
-            <a:pPr algn="ctr"/>
+            <a:pPr algn="ctr">
+              <a:defRPr/>
+            </a:pPr>
           </a:p>
         </p:txBody>
       </p:sp>
@@ -16211,7 +16669,7 @@
         <p:spPr>
           <a:xfrm>
             <a:off x="640080" y="274320"/>
-            <a:ext cx="7315200" cy="457200"/>
+            <a:ext cx="7315200" cy="482600"/>
           </a:xfrm>
           <a:prstGeom prst="rect">
             <a:avLst/>
@@ -16233,6 +16691,7 @@
               </a:defRPr>
             </a:pPr>
             <a:r>
+              <a:rPr/>
               <a:t>再診料・基本診療料</a:t>
             </a:r>
           </a:p>
@@ -16277,7 +16736,9 @@
           <a:bodyPr rtlCol="0" anchor="ctr"/>
           <a:lstStyle/>
           <a:p>
-            <a:pPr algn="ctr"/>
+            <a:pPr algn="ctr">
+              <a:defRPr/>
+            </a:pPr>
           </a:p>
         </p:txBody>
       </p:sp>
@@ -16312,6 +16773,7 @@
               </a:defRPr>
             </a:pPr>
             <a:r>
+              <a:rPr/>
               <a:t>75点</a:t>
             </a:r>
           </a:p>
@@ -16326,7 +16788,7 @@
         <p:spPr>
           <a:xfrm>
             <a:off x="2286000" y="1920240"/>
-            <a:ext cx="1828800" cy="274320"/>
+            <a:ext cx="1828800" cy="287020"/>
           </a:xfrm>
           <a:prstGeom prst="rect">
             <a:avLst/>
@@ -16348,6 +16810,7 @@
               </a:defRPr>
             </a:pPr>
             <a:r>
+              <a:rPr/>
               <a:t>旧</a:t>
             </a:r>
           </a:p>
@@ -16362,7 +16825,7 @@
         <p:spPr>
           <a:xfrm>
             <a:off x="4206240" y="1463040"/>
-            <a:ext cx="457200" cy="548640"/>
+            <a:ext cx="457200" cy="624840"/>
           </a:xfrm>
           <a:prstGeom prst="rect">
             <a:avLst/>
@@ -16384,6 +16847,7 @@
               </a:defRPr>
             </a:pPr>
             <a:r>
+              <a:rPr/>
               <a:t>→</a:t>
             </a:r>
           </a:p>
@@ -16428,7 +16892,9 @@
           <a:bodyPr rtlCol="0" anchor="ctr"/>
           <a:lstStyle/>
           <a:p>
-            <a:pPr algn="ctr"/>
+            <a:pPr algn="ctr">
+              <a:defRPr/>
+            </a:pPr>
           </a:p>
         </p:txBody>
       </p:sp>
@@ -16463,6 +16929,7 @@
               </a:defRPr>
             </a:pPr>
             <a:r>
+              <a:rPr/>
               <a:t>76点</a:t>
             </a:r>
           </a:p>
@@ -16477,7 +16944,7 @@
         <p:spPr>
           <a:xfrm>
             <a:off x="4754880" y="1920240"/>
-            <a:ext cx="1828800" cy="274320"/>
+            <a:ext cx="1828800" cy="287020"/>
           </a:xfrm>
           <a:prstGeom prst="rect">
             <a:avLst/>
@@ -16499,6 +16966,7 @@
               </a:defRPr>
             </a:pPr>
             <a:r>
+              <a:rPr/>
               <a:t>新</a:t>
             </a:r>
           </a:p>
@@ -16543,7 +17011,9 @@
           <a:bodyPr rtlCol="0" anchor="ctr"/>
           <a:lstStyle/>
           <a:p>
-            <a:pPr algn="ctr"/>
+            <a:pPr algn="ctr">
+              <a:defRPr/>
+            </a:pPr>
           </a:p>
         </p:txBody>
       </p:sp>
@@ -16588,7 +17058,9 @@
           <a:bodyPr rtlCol="0" anchor="ctr"/>
           <a:lstStyle/>
           <a:p>
-            <a:pPr algn="ctr"/>
+            <a:pPr algn="ctr">
+              <a:defRPr/>
+            </a:pPr>
           </a:p>
         </p:txBody>
       </p:sp>
@@ -16623,10 +17095,12 @@
               </a:defRPr>
             </a:pPr>
             <a:r>
+              <a:rPr/>
               <a:t>1日100人の外来で年間約36万円増</a:t>
             </a:r>
             <a:br/>
             <a:r>
+              <a:rPr/>
               <a:t>初診料（288点）・外来管理加算（52点）は変更なし</a:t>
             </a:r>
           </a:p>
@@ -16697,7 +17171,9 @@
           <a:bodyPr rtlCol="0" anchor="ctr"/>
           <a:lstStyle/>
           <a:p>
-            <a:pPr algn="ctr"/>
+            <a:pPr algn="ctr">
+              <a:defRPr/>
+            </a:pPr>
           </a:p>
         </p:txBody>
       </p:sp>
@@ -16710,7 +17186,7 @@
         <p:spPr>
           <a:xfrm>
             <a:off x="640080" y="274320"/>
-            <a:ext cx="7315200" cy="457200"/>
+            <a:ext cx="7315200" cy="482600"/>
           </a:xfrm>
           <a:prstGeom prst="rect">
             <a:avLst/>
@@ -16732,6 +17208,7 @@
               </a:defRPr>
             </a:pPr>
             <a:r>
+              <a:rPr/>
               <a:t>機能強化加算とBCP義務化</a:t>
             </a:r>
           </a:p>
@@ -16776,7 +17253,9 @@
           <a:bodyPr rtlCol="0" anchor="ctr"/>
           <a:lstStyle/>
           <a:p>
-            <a:pPr algn="ctr"/>
+            <a:pPr algn="ctr">
+              <a:defRPr/>
+            </a:pPr>
           </a:p>
         </p:txBody>
       </p:sp>
@@ -16811,6 +17290,7 @@
               </a:defRPr>
             </a:pPr>
             <a:r>
+              <a:rPr/>
               <a:t>80点（維持）</a:t>
             </a:r>
           </a:p>
@@ -16824,7 +17304,7 @@
         </p:nvSpPr>
         <p:spPr>
           <a:xfrm>
-            <a:off x="640080" y="1554480"/>
+            <a:off x="640080" y="1572768"/>
             <a:ext cx="3931920" cy="548640"/>
           </a:xfrm>
           <a:prstGeom prst="rect">
@@ -16847,10 +17327,12 @@
               </a:defRPr>
             </a:pPr>
             <a:r>
+              <a:rPr/>
               <a:t>ただし施設基準に</a:t>
             </a:r>
             <a:br/>
             <a:r>
+              <a:rPr/>
               <a:t>BCP策定が追加</a:t>
             </a:r>
           </a:p>
@@ -16895,7 +17377,9 @@
           <a:bodyPr rtlCol="0" anchor="ctr"/>
           <a:lstStyle/>
           <a:p>
-            <a:pPr algn="ctr"/>
+            <a:pPr algn="ctr">
+              <a:defRPr/>
+            </a:pPr>
           </a:p>
         </p:txBody>
       </p:sp>
@@ -16930,6 +17414,7 @@
               </a:defRPr>
             </a:pPr>
             <a:r>
+              <a:rPr/>
               <a:t>2027年5月31日</a:t>
             </a:r>
           </a:p>
@@ -16966,10 +17451,12 @@
               </a:defRPr>
             </a:pPr>
             <a:r>
+              <a:rPr/>
               <a:t>経過措置期限</a:t>
             </a:r>
             <a:br/>
             <a:r>
+              <a:rPr/>
               <a:t>未策定 = 算定不可</a:t>
             </a:r>
           </a:p>
@@ -17014,7 +17501,9 @@
           <a:bodyPr rtlCol="0" anchor="ctr"/>
           <a:lstStyle/>
           <a:p>
-            <a:pPr algn="ctr"/>
+            <a:pPr algn="ctr">
+              <a:defRPr/>
+            </a:pPr>
           </a:p>
         </p:txBody>
       </p:sp>
@@ -17059,7 +17548,9 @@
           <a:bodyPr rtlCol="0" anchor="ctr"/>
           <a:lstStyle/>
           <a:p>
-            <a:pPr algn="ctr"/>
+            <a:pPr algn="ctr">
+              <a:defRPr/>
+            </a:pPr>
           </a:p>
         </p:txBody>
       </p:sp>
@@ -17094,10 +17585,12 @@
               </a:defRPr>
             </a:pPr>
             <a:r>
+              <a:rPr/>
               <a:t>BCP = Business Continuity Plan（事業継続計画）</a:t>
             </a:r>
             <a:br/>
             <a:r>
+              <a:rPr/>
               <a:t>自然災害 + サイバーセキュリティの2本立て</a:t>
             </a:r>
           </a:p>
@@ -17168,7 +17661,9 @@
           <a:bodyPr rtlCol="0" anchor="ctr"/>
           <a:lstStyle/>
           <a:p>
-            <a:pPr algn="ctr"/>
+            <a:pPr algn="ctr">
+              <a:defRPr/>
+            </a:pPr>
           </a:p>
         </p:txBody>
       </p:sp>
@@ -17203,6 +17698,7 @@
               </a:defRPr>
             </a:pPr>
             <a:r>
+              <a:rPr/>
               <a:t>地域包括診療加算の再編</a:t>
             </a:r>
           </a:p>
@@ -17217,7 +17713,7 @@
         <p:spPr>
           <a:xfrm>
             <a:off x="640080" y="731520"/>
-            <a:ext cx="7315200" cy="274320"/>
+            <a:ext cx="7315200" cy="304799"/>
           </a:xfrm>
           <a:prstGeom prst="rect">
             <a:avLst/>
@@ -17239,6 +17735,7 @@
               </a:defRPr>
             </a:pPr>
             <a:r>
+              <a:rPr/>
               <a:t>認知症地域包括診療加算を統合 → 2区分に再編</a:t>
             </a:r>
           </a:p>
@@ -17532,7 +18029,9 @@
           <a:bodyPr rtlCol="0" anchor="ctr"/>
           <a:lstStyle/>
           <a:p>
-            <a:pPr algn="ctr"/>
+            <a:pPr algn="ctr">
+              <a:defRPr/>
+            </a:pPr>
           </a:p>
         </p:txBody>
       </p:sp>
@@ -17577,7 +18076,9 @@
           <a:bodyPr rtlCol="0" anchor="ctr"/>
           <a:lstStyle/>
           <a:p>
-            <a:pPr algn="ctr"/>
+            <a:pPr algn="ctr">
+              <a:defRPr/>
+            </a:pPr>
           </a:p>
         </p:txBody>
       </p:sp>
@@ -17612,10 +18113,12 @@
               </a:defRPr>
             </a:pPr>
             <a:r>
+              <a:rPr/>
               <a:t>管理職視点: 研修修了者の確保が加算1の鍵</a:t>
             </a:r>
             <a:br/>
             <a:r>
+              <a:rPr/>
               <a:t>加算1-2の差額: 8点/回 → 年間約28万円差（100人/日）</a:t>
             </a:r>
           </a:p>

--- a/output/education/2026-03-28_medical-fee-revision-2026/medical-fee-revision-2026_slides_attendings.pptx
+++ b/output/education/2026-03-28_medical-fee-revision-2026/medical-fee-revision-2026_slides_attendings.pptx
@@ -10980,7 +10980,7 @@
         <p:spPr>
           <a:xfrm>
             <a:off x="5029200" y="320040"/>
-            <a:ext cx="3657600" cy="301751"/>
+            <a:ext cx="3657600" cy="340360"/>
           </a:xfrm>
           <a:prstGeom prst="rect">
             <a:avLst/>
